--- a/docs/pptx/entire/ritu-entire-linsubhr-sens-anyhosp.pptx
+++ b/docs/pptx/entire/ritu-entire-linsubhr-sens-anyhosp.pptx
@@ -3045,612 +3045,612 @@
           </p:nvSpPr>
           <p:spPr>
             <a:xfrm>
-              <a:off x="1172049" y="4139915"/>
-              <a:ext cx="7090630" cy="1012120"/>
+              <a:off x="1172049" y="4126738"/>
+              <a:ext cx="7090630" cy="1030280"/>
             </a:xfrm>
             <a:custGeom>
               <a:avLst/>
               <a:pathLst>
-                <a:path w="7090630" h="1012120">
+                <a:path w="7090630" h="1030280">
                   <a:moveTo>
                     <a:pt x="0" y="0"/>
                   </a:moveTo>
                   <a:lnTo>
-                    <a:pt x="71622" y="17813"/>
-                  </a:lnTo>
-                  <a:lnTo>
-                    <a:pt x="143245" y="35402"/>
-                  </a:lnTo>
-                  <a:lnTo>
-                    <a:pt x="214867" y="52770"/>
-                  </a:lnTo>
-                  <a:lnTo>
-                    <a:pt x="286490" y="69920"/>
-                  </a:lnTo>
-                  <a:lnTo>
-                    <a:pt x="358112" y="86854"/>
-                  </a:lnTo>
-                  <a:lnTo>
-                    <a:pt x="429735" y="103576"/>
-                  </a:lnTo>
-                  <a:lnTo>
-                    <a:pt x="501357" y="120087"/>
-                  </a:lnTo>
-                  <a:lnTo>
-                    <a:pt x="572980" y="136391"/>
-                  </a:lnTo>
-                  <a:lnTo>
-                    <a:pt x="644602" y="152490"/>
-                  </a:lnTo>
-                  <a:lnTo>
-                    <a:pt x="716225" y="168386"/>
-                  </a:lnTo>
-                  <a:lnTo>
-                    <a:pt x="787847" y="184083"/>
-                  </a:lnTo>
-                  <a:lnTo>
-                    <a:pt x="859470" y="199582"/>
-                  </a:lnTo>
-                  <a:lnTo>
-                    <a:pt x="931092" y="214887"/>
-                  </a:lnTo>
-                  <a:lnTo>
-                    <a:pt x="1002715" y="229999"/>
-                  </a:lnTo>
-                  <a:lnTo>
-                    <a:pt x="1074337" y="244922"/>
-                  </a:lnTo>
-                  <a:lnTo>
-                    <a:pt x="1145960" y="259657"/>
-                  </a:lnTo>
-                  <a:lnTo>
-                    <a:pt x="1217582" y="274206"/>
-                  </a:lnTo>
-                  <a:lnTo>
-                    <a:pt x="1289205" y="288573"/>
-                  </a:lnTo>
-                  <a:lnTo>
-                    <a:pt x="1360827" y="302760"/>
-                  </a:lnTo>
-                  <a:lnTo>
-                    <a:pt x="1432450" y="316768"/>
-                  </a:lnTo>
-                  <a:lnTo>
-                    <a:pt x="1504073" y="330599"/>
-                  </a:lnTo>
-                  <a:lnTo>
-                    <a:pt x="1575695" y="344258"/>
-                  </a:lnTo>
-                  <a:lnTo>
-                    <a:pt x="1647318" y="357744"/>
-                  </a:lnTo>
-                  <a:lnTo>
-                    <a:pt x="1718940" y="371061"/>
-                  </a:lnTo>
-                  <a:lnTo>
-                    <a:pt x="1790563" y="384210"/>
-                  </a:lnTo>
-                  <a:lnTo>
-                    <a:pt x="1862185" y="397195"/>
-                  </a:lnTo>
-                  <a:lnTo>
-                    <a:pt x="1933808" y="410016"/>
-                  </a:lnTo>
-                  <a:lnTo>
-                    <a:pt x="2005430" y="422676"/>
-                  </a:lnTo>
-                  <a:lnTo>
-                    <a:pt x="2077053" y="435177"/>
-                  </a:lnTo>
-                  <a:lnTo>
-                    <a:pt x="2148675" y="447520"/>
-                  </a:lnTo>
-                  <a:lnTo>
-                    <a:pt x="2220298" y="459709"/>
-                  </a:lnTo>
-                  <a:lnTo>
-                    <a:pt x="2291920" y="471745"/>
-                  </a:lnTo>
-                  <a:lnTo>
-                    <a:pt x="2363543" y="483629"/>
-                  </a:lnTo>
-                  <a:lnTo>
-                    <a:pt x="2435165" y="495363"/>
-                  </a:lnTo>
-                  <a:lnTo>
-                    <a:pt x="2506788" y="506951"/>
-                  </a:lnTo>
-                  <a:lnTo>
-                    <a:pt x="2578410" y="518393"/>
-                  </a:lnTo>
-                  <a:lnTo>
-                    <a:pt x="2650033" y="529690"/>
-                  </a:lnTo>
-                  <a:lnTo>
-                    <a:pt x="2721655" y="540846"/>
-                  </a:lnTo>
-                  <a:lnTo>
-                    <a:pt x="2793278" y="551862"/>
-                  </a:lnTo>
-                  <a:lnTo>
-                    <a:pt x="2864901" y="562739"/>
-                  </a:lnTo>
-                  <a:lnTo>
-                    <a:pt x="2936523" y="573480"/>
-                  </a:lnTo>
-                  <a:lnTo>
-                    <a:pt x="3008146" y="584085"/>
-                  </a:lnTo>
-                  <a:lnTo>
-                    <a:pt x="3079768" y="588188"/>
-                  </a:lnTo>
-                  <a:lnTo>
-                    <a:pt x="3151391" y="588684"/>
-                  </a:lnTo>
-                  <a:lnTo>
-                    <a:pt x="3223013" y="589179"/>
-                  </a:lnTo>
-                  <a:lnTo>
-                    <a:pt x="3294636" y="589675"/>
-                  </a:lnTo>
-                  <a:lnTo>
-                    <a:pt x="3366258" y="590170"/>
-                  </a:lnTo>
-                  <a:lnTo>
-                    <a:pt x="3437881" y="590664"/>
-                  </a:lnTo>
-                  <a:lnTo>
-                    <a:pt x="3509503" y="591159"/>
-                  </a:lnTo>
-                  <a:lnTo>
-                    <a:pt x="3581126" y="591653"/>
-                  </a:lnTo>
-                  <a:lnTo>
-                    <a:pt x="3652748" y="592147"/>
-                  </a:lnTo>
-                  <a:lnTo>
-                    <a:pt x="3724371" y="592641"/>
-                  </a:lnTo>
-                  <a:lnTo>
-                    <a:pt x="3795993" y="593134"/>
-                  </a:lnTo>
-                  <a:lnTo>
-                    <a:pt x="3867616" y="593627"/>
-                  </a:lnTo>
-                  <a:lnTo>
-                    <a:pt x="3939238" y="594120"/>
-                  </a:lnTo>
-                  <a:lnTo>
-                    <a:pt x="4010861" y="594612"/>
-                  </a:lnTo>
-                  <a:lnTo>
-                    <a:pt x="4082483" y="595104"/>
-                  </a:lnTo>
-                  <a:lnTo>
-                    <a:pt x="4154106" y="595596"/>
-                  </a:lnTo>
-                  <a:lnTo>
-                    <a:pt x="4225729" y="596087"/>
-                  </a:lnTo>
-                  <a:lnTo>
-                    <a:pt x="4297351" y="596579"/>
-                  </a:lnTo>
-                  <a:lnTo>
-                    <a:pt x="4368974" y="597070"/>
-                  </a:lnTo>
-                  <a:lnTo>
-                    <a:pt x="4440596" y="597560"/>
-                  </a:lnTo>
-                  <a:lnTo>
-                    <a:pt x="4512219" y="598051"/>
-                  </a:lnTo>
-                  <a:lnTo>
-                    <a:pt x="4583841" y="598541"/>
-                  </a:lnTo>
-                  <a:lnTo>
-                    <a:pt x="4655464" y="599030"/>
-                  </a:lnTo>
-                  <a:lnTo>
-                    <a:pt x="4727086" y="599520"/>
-                  </a:lnTo>
-                  <a:lnTo>
-                    <a:pt x="4798709" y="600009"/>
-                  </a:lnTo>
-                  <a:lnTo>
-                    <a:pt x="4870331" y="600498"/>
-                  </a:lnTo>
-                  <a:lnTo>
-                    <a:pt x="4941954" y="600986"/>
-                  </a:lnTo>
-                  <a:lnTo>
-                    <a:pt x="5013576" y="601475"/>
-                  </a:lnTo>
-                  <a:lnTo>
-                    <a:pt x="5085199" y="601963"/>
-                  </a:lnTo>
-                  <a:lnTo>
-                    <a:pt x="5156821" y="602450"/>
-                  </a:lnTo>
-                  <a:lnTo>
-                    <a:pt x="5228444" y="602938"/>
-                  </a:lnTo>
-                  <a:lnTo>
-                    <a:pt x="5300066" y="603425"/>
-                  </a:lnTo>
-                  <a:lnTo>
-                    <a:pt x="5371689" y="603912"/>
-                  </a:lnTo>
-                  <a:lnTo>
-                    <a:pt x="5443311" y="604398"/>
-                  </a:lnTo>
-                  <a:lnTo>
-                    <a:pt x="5514934" y="604885"/>
-                  </a:lnTo>
-                  <a:lnTo>
-                    <a:pt x="5586557" y="605371"/>
-                  </a:lnTo>
-                  <a:lnTo>
-                    <a:pt x="5658179" y="605856"/>
-                  </a:lnTo>
-                  <a:lnTo>
-                    <a:pt x="5729802" y="606342"/>
-                  </a:lnTo>
-                  <a:lnTo>
-                    <a:pt x="5801424" y="606827"/>
-                  </a:lnTo>
-                  <a:lnTo>
-                    <a:pt x="5873047" y="607312"/>
-                  </a:lnTo>
-                  <a:lnTo>
-                    <a:pt x="5944669" y="607796"/>
-                  </a:lnTo>
-                  <a:lnTo>
-                    <a:pt x="6016292" y="608280"/>
-                  </a:lnTo>
-                  <a:lnTo>
-                    <a:pt x="6087914" y="608764"/>
-                  </a:lnTo>
-                  <a:lnTo>
-                    <a:pt x="6159537" y="609248"/>
-                  </a:lnTo>
-                  <a:lnTo>
-                    <a:pt x="6231159" y="609731"/>
-                  </a:lnTo>
-                  <a:lnTo>
-                    <a:pt x="6302782" y="610214"/>
-                  </a:lnTo>
-                  <a:lnTo>
-                    <a:pt x="6374404" y="610697"/>
-                  </a:lnTo>
-                  <a:lnTo>
-                    <a:pt x="6446027" y="611180"/>
-                  </a:lnTo>
-                  <a:lnTo>
-                    <a:pt x="6517649" y="611662"/>
-                  </a:lnTo>
-                  <a:lnTo>
-                    <a:pt x="6589272" y="612144"/>
-                  </a:lnTo>
-                  <a:lnTo>
-                    <a:pt x="6660894" y="612625"/>
-                  </a:lnTo>
-                  <a:lnTo>
-                    <a:pt x="6732517" y="613107"/>
-                  </a:lnTo>
-                  <a:lnTo>
-                    <a:pt x="6804139" y="613588"/>
-                  </a:lnTo>
-                  <a:lnTo>
-                    <a:pt x="6875762" y="614068"/>
-                  </a:lnTo>
-                  <a:lnTo>
-                    <a:pt x="6947385" y="614549"/>
-                  </a:lnTo>
-                  <a:lnTo>
-                    <a:pt x="7019007" y="615029"/>
-                  </a:lnTo>
-                  <a:lnTo>
-                    <a:pt x="7090630" y="615509"/>
-                  </a:lnTo>
-                  <a:lnTo>
-                    <a:pt x="7090630" y="1012120"/>
-                  </a:lnTo>
-                  <a:lnTo>
-                    <a:pt x="7019007" y="1006962"/>
-                  </a:lnTo>
-                  <a:lnTo>
-                    <a:pt x="6947385" y="1001739"/>
-                  </a:lnTo>
-                  <a:lnTo>
-                    <a:pt x="6875762" y="996449"/>
-                  </a:lnTo>
-                  <a:lnTo>
-                    <a:pt x="6804139" y="991092"/>
-                  </a:lnTo>
-                  <a:lnTo>
-                    <a:pt x="6732517" y="985667"/>
-                  </a:lnTo>
-                  <a:lnTo>
-                    <a:pt x="6660894" y="980173"/>
-                  </a:lnTo>
-                  <a:lnTo>
-                    <a:pt x="6589272" y="974609"/>
-                  </a:lnTo>
-                  <a:lnTo>
-                    <a:pt x="6517649" y="968974"/>
-                  </a:lnTo>
-                  <a:lnTo>
-                    <a:pt x="6446027" y="963267"/>
-                  </a:lnTo>
-                  <a:lnTo>
-                    <a:pt x="6374404" y="957487"/>
-                  </a:lnTo>
-                  <a:lnTo>
-                    <a:pt x="6302782" y="951635"/>
-                  </a:lnTo>
-                  <a:lnTo>
-                    <a:pt x="6231159" y="945707"/>
-                  </a:lnTo>
-                  <a:lnTo>
-                    <a:pt x="6159537" y="939704"/>
-                  </a:lnTo>
-                  <a:lnTo>
-                    <a:pt x="6087914" y="933625"/>
-                  </a:lnTo>
-                  <a:lnTo>
-                    <a:pt x="6016292" y="927468"/>
-                  </a:lnTo>
-                  <a:lnTo>
-                    <a:pt x="5944669" y="921233"/>
-                  </a:lnTo>
-                  <a:lnTo>
-                    <a:pt x="5873047" y="914919"/>
-                  </a:lnTo>
-                  <a:lnTo>
-                    <a:pt x="5801424" y="908524"/>
-                  </a:lnTo>
-                  <a:lnTo>
-                    <a:pt x="5729802" y="902048"/>
-                  </a:lnTo>
-                  <a:lnTo>
-                    <a:pt x="5658179" y="895490"/>
-                  </a:lnTo>
-                  <a:lnTo>
-                    <a:pt x="5586557" y="888848"/>
-                  </a:lnTo>
-                  <a:lnTo>
-                    <a:pt x="5514934" y="882121"/>
-                  </a:lnTo>
-                  <a:lnTo>
-                    <a:pt x="5443311" y="875309"/>
-                  </a:lnTo>
-                  <a:lnTo>
-                    <a:pt x="5371689" y="868410"/>
-                  </a:lnTo>
-                  <a:lnTo>
-                    <a:pt x="5300066" y="861423"/>
-                  </a:lnTo>
-                  <a:lnTo>
-                    <a:pt x="5228444" y="854348"/>
-                  </a:lnTo>
-                  <a:lnTo>
-                    <a:pt x="5156821" y="847182"/>
-                  </a:lnTo>
-                  <a:lnTo>
-                    <a:pt x="5085199" y="839925"/>
-                  </a:lnTo>
-                  <a:lnTo>
-                    <a:pt x="5013576" y="832576"/>
-                  </a:lnTo>
-                  <a:lnTo>
-                    <a:pt x="4941954" y="825133"/>
-                  </a:lnTo>
-                  <a:lnTo>
-                    <a:pt x="4870331" y="817596"/>
-                  </a:lnTo>
-                  <a:lnTo>
-                    <a:pt x="4798709" y="809962"/>
-                  </a:lnTo>
-                  <a:lnTo>
-                    <a:pt x="4727086" y="802232"/>
-                  </a:lnTo>
-                  <a:lnTo>
-                    <a:pt x="4655464" y="794403"/>
-                  </a:lnTo>
-                  <a:lnTo>
-                    <a:pt x="4583841" y="786474"/>
-                  </a:lnTo>
-                  <a:lnTo>
-                    <a:pt x="4512219" y="778445"/>
-                  </a:lnTo>
-                  <a:lnTo>
-                    <a:pt x="4440596" y="770313"/>
-                  </a:lnTo>
-                  <a:lnTo>
-                    <a:pt x="4368974" y="762077"/>
-                  </a:lnTo>
-                  <a:lnTo>
-                    <a:pt x="4297351" y="753737"/>
-                  </a:lnTo>
-                  <a:lnTo>
-                    <a:pt x="4225729" y="745291"/>
-                  </a:lnTo>
-                  <a:lnTo>
-                    <a:pt x="4154106" y="736737"/>
-                  </a:lnTo>
-                  <a:lnTo>
-                    <a:pt x="4082483" y="728075"/>
-                  </a:lnTo>
-                  <a:lnTo>
-                    <a:pt x="4010861" y="719302"/>
-                  </a:lnTo>
-                  <a:lnTo>
-                    <a:pt x="3939238" y="710417"/>
-                  </a:lnTo>
-                  <a:lnTo>
-                    <a:pt x="3867616" y="701420"/>
-                  </a:lnTo>
-                  <a:lnTo>
-                    <a:pt x="3795993" y="692308"/>
-                  </a:lnTo>
-                  <a:lnTo>
-                    <a:pt x="3724371" y="683080"/>
-                  </a:lnTo>
-                  <a:lnTo>
-                    <a:pt x="3652748" y="673734"/>
-                  </a:lnTo>
-                  <a:lnTo>
-                    <a:pt x="3581126" y="664269"/>
-                  </a:lnTo>
-                  <a:lnTo>
-                    <a:pt x="3509503" y="654685"/>
-                  </a:lnTo>
-                  <a:lnTo>
-                    <a:pt x="3437881" y="644978"/>
-                  </a:lnTo>
-                  <a:lnTo>
-                    <a:pt x="3366258" y="635147"/>
-                  </a:lnTo>
-                  <a:lnTo>
-                    <a:pt x="3294636" y="625191"/>
-                  </a:lnTo>
-                  <a:lnTo>
-                    <a:pt x="3223013" y="615109"/>
-                  </a:lnTo>
-                  <a:lnTo>
-                    <a:pt x="3151391" y="604898"/>
-                  </a:lnTo>
-                  <a:lnTo>
-                    <a:pt x="3079768" y="594558"/>
-                  </a:lnTo>
-                  <a:lnTo>
-                    <a:pt x="3008146" y="587691"/>
-                  </a:lnTo>
-                  <a:lnTo>
-                    <a:pt x="2936523" y="587195"/>
-                  </a:lnTo>
-                  <a:lnTo>
-                    <a:pt x="2864901" y="586698"/>
-                  </a:lnTo>
-                  <a:lnTo>
-                    <a:pt x="2793278" y="586201"/>
-                  </a:lnTo>
-                  <a:lnTo>
-                    <a:pt x="2721655" y="585703"/>
-                  </a:lnTo>
-                  <a:lnTo>
-                    <a:pt x="2650033" y="585206"/>
-                  </a:lnTo>
-                  <a:lnTo>
-                    <a:pt x="2578410" y="584708"/>
-                  </a:lnTo>
-                  <a:lnTo>
-                    <a:pt x="2506788" y="584209"/>
-                  </a:lnTo>
-                  <a:lnTo>
-                    <a:pt x="2435165" y="583711"/>
-                  </a:lnTo>
-                  <a:lnTo>
-                    <a:pt x="2363543" y="583212"/>
-                  </a:lnTo>
-                  <a:lnTo>
-                    <a:pt x="2291920" y="582713"/>
-                  </a:lnTo>
-                  <a:lnTo>
-                    <a:pt x="2220298" y="582213"/>
-                  </a:lnTo>
-                  <a:lnTo>
-                    <a:pt x="2148675" y="581713"/>
-                  </a:lnTo>
-                  <a:lnTo>
-                    <a:pt x="2077053" y="581213"/>
-                  </a:lnTo>
-                  <a:lnTo>
-                    <a:pt x="2005430" y="580713"/>
-                  </a:lnTo>
-                  <a:lnTo>
-                    <a:pt x="1933808" y="580212"/>
-                  </a:lnTo>
-                  <a:lnTo>
-                    <a:pt x="1862185" y="579711"/>
-                  </a:lnTo>
-                  <a:lnTo>
-                    <a:pt x="1790563" y="579210"/>
-                  </a:lnTo>
-                  <a:lnTo>
-                    <a:pt x="1718940" y="578708"/>
-                  </a:lnTo>
-                  <a:lnTo>
-                    <a:pt x="1647318" y="578206"/>
-                  </a:lnTo>
-                  <a:lnTo>
-                    <a:pt x="1575695" y="577704"/>
-                  </a:lnTo>
-                  <a:lnTo>
-                    <a:pt x="1504073" y="577201"/>
-                  </a:lnTo>
-                  <a:lnTo>
-                    <a:pt x="1432450" y="576698"/>
-                  </a:lnTo>
-                  <a:lnTo>
-                    <a:pt x="1360827" y="576195"/>
-                  </a:lnTo>
-                  <a:lnTo>
-                    <a:pt x="1289205" y="575692"/>
-                  </a:lnTo>
-                  <a:lnTo>
-                    <a:pt x="1217582" y="575188"/>
-                  </a:lnTo>
-                  <a:lnTo>
-                    <a:pt x="1145960" y="574684"/>
-                  </a:lnTo>
-                  <a:lnTo>
-                    <a:pt x="1074337" y="574180"/>
-                  </a:lnTo>
-                  <a:lnTo>
-                    <a:pt x="1002715" y="573675"/>
-                  </a:lnTo>
-                  <a:lnTo>
-                    <a:pt x="931092" y="573170"/>
-                  </a:lnTo>
-                  <a:lnTo>
-                    <a:pt x="859470" y="572665"/>
-                  </a:lnTo>
-                  <a:lnTo>
-                    <a:pt x="787847" y="572159"/>
-                  </a:lnTo>
-                  <a:lnTo>
-                    <a:pt x="716225" y="571654"/>
-                  </a:lnTo>
-                  <a:lnTo>
-                    <a:pt x="644602" y="571147"/>
-                  </a:lnTo>
-                  <a:lnTo>
-                    <a:pt x="572980" y="570641"/>
-                  </a:lnTo>
-                  <a:lnTo>
-                    <a:pt x="501357" y="570134"/>
-                  </a:lnTo>
-                  <a:lnTo>
-                    <a:pt x="429735" y="569627"/>
-                  </a:lnTo>
-                  <a:lnTo>
-                    <a:pt x="358112" y="569120"/>
-                  </a:lnTo>
-                  <a:lnTo>
-                    <a:pt x="286490" y="568612"/>
-                  </a:lnTo>
-                  <a:lnTo>
-                    <a:pt x="214867" y="568104"/>
-                  </a:lnTo>
-                  <a:lnTo>
-                    <a:pt x="143245" y="567596"/>
-                  </a:lnTo>
-                  <a:lnTo>
-                    <a:pt x="71622" y="567087"/>
-                  </a:lnTo>
-                  <a:lnTo>
-                    <a:pt x="0" y="566579"/>
+                    <a:pt x="71622" y="18287"/>
+                  </a:lnTo>
+                  <a:lnTo>
+                    <a:pt x="143245" y="36340"/>
+                  </a:lnTo>
+                  <a:lnTo>
+                    <a:pt x="214867" y="54163"/>
+                  </a:lnTo>
+                  <a:lnTo>
+                    <a:pt x="286490" y="71758"/>
+                  </a:lnTo>
+                  <a:lnTo>
+                    <a:pt x="358112" y="89128"/>
+                  </a:lnTo>
+                  <a:lnTo>
+                    <a:pt x="429735" y="106275"/>
+                  </a:lnTo>
+                  <a:lnTo>
+                    <a:pt x="501357" y="123204"/>
+                  </a:lnTo>
+                  <a:lnTo>
+                    <a:pt x="572980" y="139916"/>
+                  </a:lnTo>
+                  <a:lnTo>
+                    <a:pt x="644602" y="156415"/>
+                  </a:lnTo>
+                  <a:lnTo>
+                    <a:pt x="716225" y="172703"/>
+                  </a:lnTo>
+                  <a:lnTo>
+                    <a:pt x="787847" y="188782"/>
+                  </a:lnTo>
+                  <a:lnTo>
+                    <a:pt x="859470" y="204656"/>
+                  </a:lnTo>
+                  <a:lnTo>
+                    <a:pt x="931092" y="220327"/>
+                  </a:lnTo>
+                  <a:lnTo>
+                    <a:pt x="1002715" y="235798"/>
+                  </a:lnTo>
+                  <a:lnTo>
+                    <a:pt x="1074337" y="251070"/>
+                  </a:lnTo>
+                  <a:lnTo>
+                    <a:pt x="1145960" y="266148"/>
+                  </a:lnTo>
+                  <a:lnTo>
+                    <a:pt x="1217582" y="281033"/>
+                  </a:lnTo>
+                  <a:lnTo>
+                    <a:pt x="1289205" y="295728"/>
+                  </a:lnTo>
+                  <a:lnTo>
+                    <a:pt x="1360827" y="310234"/>
+                  </a:lnTo>
+                  <a:lnTo>
+                    <a:pt x="1432450" y="324556"/>
+                  </a:lnTo>
+                  <a:lnTo>
+                    <a:pt x="1504073" y="338694"/>
+                  </a:lnTo>
+                  <a:lnTo>
+                    <a:pt x="1575695" y="352651"/>
+                  </a:lnTo>
+                  <a:lnTo>
+                    <a:pt x="1647318" y="366430"/>
+                  </a:lnTo>
+                  <a:lnTo>
+                    <a:pt x="1718940" y="380033"/>
+                  </a:lnTo>
+                  <a:lnTo>
+                    <a:pt x="1790563" y="393462"/>
+                  </a:lnTo>
+                  <a:lnTo>
+                    <a:pt x="1862185" y="406720"/>
+                  </a:lnTo>
+                  <a:lnTo>
+                    <a:pt x="1933808" y="419807"/>
+                  </a:lnTo>
+                  <a:lnTo>
+                    <a:pt x="2005430" y="432728"/>
+                  </a:lnTo>
+                  <a:lnTo>
+                    <a:pt x="2077053" y="445483"/>
+                  </a:lnTo>
+                  <a:lnTo>
+                    <a:pt x="2148675" y="458076"/>
+                  </a:lnTo>
+                  <a:lnTo>
+                    <a:pt x="2220298" y="470507"/>
+                  </a:lnTo>
+                  <a:lnTo>
+                    <a:pt x="2291920" y="482779"/>
+                  </a:lnTo>
+                  <a:lnTo>
+                    <a:pt x="2363543" y="494895"/>
+                  </a:lnTo>
+                  <a:lnTo>
+                    <a:pt x="2435165" y="506856"/>
+                  </a:lnTo>
+                  <a:lnTo>
+                    <a:pt x="2506788" y="518663"/>
+                  </a:lnTo>
+                  <a:lnTo>
+                    <a:pt x="2578410" y="530320"/>
+                  </a:lnTo>
+                  <a:lnTo>
+                    <a:pt x="2650033" y="541828"/>
+                  </a:lnTo>
+                  <a:lnTo>
+                    <a:pt x="2721655" y="553189"/>
+                  </a:lnTo>
+                  <a:lnTo>
+                    <a:pt x="2793278" y="564404"/>
+                  </a:lnTo>
+                  <a:lnTo>
+                    <a:pt x="2864901" y="575476"/>
+                  </a:lnTo>
+                  <a:lnTo>
+                    <a:pt x="2936523" y="586407"/>
+                  </a:lnTo>
+                  <a:lnTo>
+                    <a:pt x="3008146" y="597197"/>
+                  </a:lnTo>
+                  <a:lnTo>
+                    <a:pt x="3079768" y="601503"/>
+                  </a:lnTo>
+                  <a:lnTo>
+                    <a:pt x="3151391" y="602213"/>
+                  </a:lnTo>
+                  <a:lnTo>
+                    <a:pt x="3223013" y="602923"/>
+                  </a:lnTo>
+                  <a:lnTo>
+                    <a:pt x="3294636" y="603632"/>
+                  </a:lnTo>
+                  <a:lnTo>
+                    <a:pt x="3366258" y="604341"/>
+                  </a:lnTo>
+                  <a:lnTo>
+                    <a:pt x="3437881" y="605049"/>
+                  </a:lnTo>
+                  <a:lnTo>
+                    <a:pt x="3509503" y="605756"/>
+                  </a:lnTo>
+                  <a:lnTo>
+                    <a:pt x="3581126" y="606463"/>
+                  </a:lnTo>
+                  <a:lnTo>
+                    <a:pt x="3652748" y="607169"/>
+                  </a:lnTo>
+                  <a:lnTo>
+                    <a:pt x="3724371" y="607875"/>
+                  </a:lnTo>
+                  <a:lnTo>
+                    <a:pt x="3795993" y="608580"/>
+                  </a:lnTo>
+                  <a:lnTo>
+                    <a:pt x="3867616" y="609284"/>
+                  </a:lnTo>
+                  <a:lnTo>
+                    <a:pt x="3939238" y="609988"/>
+                  </a:lnTo>
+                  <a:lnTo>
+                    <a:pt x="4010861" y="610691"/>
+                  </a:lnTo>
+                  <a:lnTo>
+                    <a:pt x="4082483" y="611394"/>
+                  </a:lnTo>
+                  <a:lnTo>
+                    <a:pt x="4154106" y="612096"/>
+                  </a:lnTo>
+                  <a:lnTo>
+                    <a:pt x="4225729" y="612797"/>
+                  </a:lnTo>
+                  <a:lnTo>
+                    <a:pt x="4297351" y="613498"/>
+                  </a:lnTo>
+                  <a:lnTo>
+                    <a:pt x="4368974" y="614198"/>
+                  </a:lnTo>
+                  <a:lnTo>
+                    <a:pt x="4440596" y="614898"/>
+                  </a:lnTo>
+                  <a:lnTo>
+                    <a:pt x="4512219" y="615597"/>
+                  </a:lnTo>
+                  <a:lnTo>
+                    <a:pt x="4583841" y="616295"/>
+                  </a:lnTo>
+                  <a:lnTo>
+                    <a:pt x="4655464" y="616993"/>
+                  </a:lnTo>
+                  <a:lnTo>
+                    <a:pt x="4727086" y="617690"/>
+                  </a:lnTo>
+                  <a:lnTo>
+                    <a:pt x="4798709" y="618387"/>
+                  </a:lnTo>
+                  <a:lnTo>
+                    <a:pt x="4870331" y="619083"/>
+                  </a:lnTo>
+                  <a:lnTo>
+                    <a:pt x="4941954" y="619778"/>
+                  </a:lnTo>
+                  <a:lnTo>
+                    <a:pt x="5013576" y="620473"/>
+                  </a:lnTo>
+                  <a:lnTo>
+                    <a:pt x="5085199" y="621167"/>
+                  </a:lnTo>
+                  <a:lnTo>
+                    <a:pt x="5156821" y="621861"/>
+                  </a:lnTo>
+                  <a:lnTo>
+                    <a:pt x="5228444" y="622554"/>
+                  </a:lnTo>
+                  <a:lnTo>
+                    <a:pt x="5300066" y="623246"/>
+                  </a:lnTo>
+                  <a:lnTo>
+                    <a:pt x="5371689" y="623938"/>
+                  </a:lnTo>
+                  <a:lnTo>
+                    <a:pt x="5443311" y="624629"/>
+                  </a:lnTo>
+                  <a:lnTo>
+                    <a:pt x="5514934" y="625320"/>
+                  </a:lnTo>
+                  <a:lnTo>
+                    <a:pt x="5586557" y="626010"/>
+                  </a:lnTo>
+                  <a:lnTo>
+                    <a:pt x="5658179" y="626699"/>
+                  </a:lnTo>
+                  <a:lnTo>
+                    <a:pt x="5729802" y="627388"/>
+                  </a:lnTo>
+                  <a:lnTo>
+                    <a:pt x="5801424" y="628076"/>
+                  </a:lnTo>
+                  <a:lnTo>
+                    <a:pt x="5873047" y="628764"/>
+                  </a:lnTo>
+                  <a:lnTo>
+                    <a:pt x="5944669" y="629451"/>
+                  </a:lnTo>
+                  <a:lnTo>
+                    <a:pt x="6016292" y="630138"/>
+                  </a:lnTo>
+                  <a:lnTo>
+                    <a:pt x="6087914" y="630823"/>
+                  </a:lnTo>
+                  <a:lnTo>
+                    <a:pt x="6159537" y="631509"/>
+                  </a:lnTo>
+                  <a:lnTo>
+                    <a:pt x="6231159" y="632194"/>
+                  </a:lnTo>
+                  <a:lnTo>
+                    <a:pt x="6302782" y="632878"/>
+                  </a:lnTo>
+                  <a:lnTo>
+                    <a:pt x="6374404" y="633561"/>
+                  </a:lnTo>
+                  <a:lnTo>
+                    <a:pt x="6446027" y="634244"/>
+                  </a:lnTo>
+                  <a:lnTo>
+                    <a:pt x="6517649" y="634927"/>
+                  </a:lnTo>
+                  <a:lnTo>
+                    <a:pt x="6589272" y="635608"/>
+                  </a:lnTo>
+                  <a:lnTo>
+                    <a:pt x="6660894" y="636290"/>
+                  </a:lnTo>
+                  <a:lnTo>
+                    <a:pt x="6732517" y="636970"/>
+                  </a:lnTo>
+                  <a:lnTo>
+                    <a:pt x="6804139" y="637650"/>
+                  </a:lnTo>
+                  <a:lnTo>
+                    <a:pt x="6875762" y="638330"/>
+                  </a:lnTo>
+                  <a:lnTo>
+                    <a:pt x="6947385" y="639009"/>
+                  </a:lnTo>
+                  <a:lnTo>
+                    <a:pt x="7019007" y="639687"/>
+                  </a:lnTo>
+                  <a:lnTo>
+                    <a:pt x="7090630" y="640365"/>
+                  </a:lnTo>
+                  <a:lnTo>
+                    <a:pt x="7090630" y="1030280"/>
+                  </a:lnTo>
+                  <a:lnTo>
+                    <a:pt x="7019007" y="1025098"/>
+                  </a:lnTo>
+                  <a:lnTo>
+                    <a:pt x="6947385" y="1019848"/>
+                  </a:lnTo>
+                  <a:lnTo>
+                    <a:pt x="6875762" y="1014530"/>
+                  </a:lnTo>
+                  <a:lnTo>
+                    <a:pt x="6804139" y="1009143"/>
+                  </a:lnTo>
+                  <a:lnTo>
+                    <a:pt x="6732517" y="1003687"/>
+                  </a:lnTo>
+                  <a:lnTo>
+                    <a:pt x="6660894" y="998160"/>
+                  </a:lnTo>
+                  <a:lnTo>
+                    <a:pt x="6589272" y="992561"/>
+                  </a:lnTo>
+                  <a:lnTo>
+                    <a:pt x="6517649" y="986890"/>
+                  </a:lnTo>
+                  <a:lnTo>
+                    <a:pt x="6446027" y="981146"/>
+                  </a:lnTo>
+                  <a:lnTo>
+                    <a:pt x="6374404" y="975327"/>
+                  </a:lnTo>
+                  <a:lnTo>
+                    <a:pt x="6302782" y="969432"/>
+                  </a:lnTo>
+                  <a:lnTo>
+                    <a:pt x="6231159" y="963462"/>
+                  </a:lnTo>
+                  <a:lnTo>
+                    <a:pt x="6159537" y="957414"/>
+                  </a:lnTo>
+                  <a:lnTo>
+                    <a:pt x="6087914" y="951288"/>
+                  </a:lnTo>
+                  <a:lnTo>
+                    <a:pt x="6016292" y="945082"/>
+                  </a:lnTo>
+                  <a:lnTo>
+                    <a:pt x="5944669" y="938796"/>
+                  </a:lnTo>
+                  <a:lnTo>
+                    <a:pt x="5873047" y="932429"/>
+                  </a:lnTo>
+                  <a:lnTo>
+                    <a:pt x="5801424" y="925979"/>
+                  </a:lnTo>
+                  <a:lnTo>
+                    <a:pt x="5729802" y="919446"/>
+                  </a:lnTo>
+                  <a:lnTo>
+                    <a:pt x="5658179" y="912828"/>
+                  </a:lnTo>
+                  <a:lnTo>
+                    <a:pt x="5586557" y="906124"/>
+                  </a:lnTo>
+                  <a:lnTo>
+                    <a:pt x="5514934" y="899334"/>
+                  </a:lnTo>
+                  <a:lnTo>
+                    <a:pt x="5443311" y="892455"/>
+                  </a:lnTo>
+                  <a:lnTo>
+                    <a:pt x="5371689" y="885488"/>
+                  </a:lnTo>
+                  <a:lnTo>
+                    <a:pt x="5300066" y="878430"/>
+                  </a:lnTo>
+                  <a:lnTo>
+                    <a:pt x="5228444" y="871281"/>
+                  </a:lnTo>
+                  <a:lnTo>
+                    <a:pt x="5156821" y="864040"/>
+                  </a:lnTo>
+                  <a:lnTo>
+                    <a:pt x="5085199" y="856704"/>
+                  </a:lnTo>
+                  <a:lnTo>
+                    <a:pt x="5013576" y="849274"/>
+                  </a:lnTo>
+                  <a:lnTo>
+                    <a:pt x="4941954" y="841747"/>
+                  </a:lnTo>
+                  <a:lnTo>
+                    <a:pt x="4870331" y="834123"/>
+                  </a:lnTo>
+                  <a:lnTo>
+                    <a:pt x="4798709" y="826401"/>
+                  </a:lnTo>
+                  <a:lnTo>
+                    <a:pt x="4727086" y="818578"/>
+                  </a:lnTo>
+                  <a:lnTo>
+                    <a:pt x="4655464" y="810654"/>
+                  </a:lnTo>
+                  <a:lnTo>
+                    <a:pt x="4583841" y="802627"/>
+                  </a:lnTo>
+                  <a:lnTo>
+                    <a:pt x="4512219" y="794496"/>
+                  </a:lnTo>
+                  <a:lnTo>
+                    <a:pt x="4440596" y="786260"/>
+                  </a:lnTo>
+                  <a:lnTo>
+                    <a:pt x="4368974" y="777918"/>
+                  </a:lnTo>
+                  <a:lnTo>
+                    <a:pt x="4297351" y="769467"/>
+                  </a:lnTo>
+                  <a:lnTo>
+                    <a:pt x="4225729" y="760907"/>
+                  </a:lnTo>
+                  <a:lnTo>
+                    <a:pt x="4154106" y="752236"/>
+                  </a:lnTo>
+                  <a:lnTo>
+                    <a:pt x="4082483" y="743453"/>
+                  </a:lnTo>
+                  <a:lnTo>
+                    <a:pt x="4010861" y="734556"/>
+                  </a:lnTo>
+                  <a:lnTo>
+                    <a:pt x="3939238" y="725544"/>
+                  </a:lnTo>
+                  <a:lnTo>
+                    <a:pt x="3867616" y="716416"/>
+                  </a:lnTo>
+                  <a:lnTo>
+                    <a:pt x="3795993" y="707169"/>
+                  </a:lnTo>
+                  <a:lnTo>
+                    <a:pt x="3724371" y="697802"/>
+                  </a:lnTo>
+                  <a:lnTo>
+                    <a:pt x="3652748" y="688314"/>
+                  </a:lnTo>
+                  <a:lnTo>
+                    <a:pt x="3581126" y="678703"/>
+                  </a:lnTo>
+                  <a:lnTo>
+                    <a:pt x="3509503" y="668968"/>
+                  </a:lnTo>
+                  <a:lnTo>
+                    <a:pt x="3437881" y="659106"/>
+                  </a:lnTo>
+                  <a:lnTo>
+                    <a:pt x="3366258" y="649117"/>
+                  </a:lnTo>
+                  <a:lnTo>
+                    <a:pt x="3294636" y="638999"/>
+                  </a:lnTo>
+                  <a:lnTo>
+                    <a:pt x="3223013" y="628749"/>
+                  </a:lnTo>
+                  <a:lnTo>
+                    <a:pt x="3151391" y="618367"/>
+                  </a:lnTo>
+                  <a:lnTo>
+                    <a:pt x="3079768" y="607850"/>
+                  </a:lnTo>
+                  <a:lnTo>
+                    <a:pt x="3008146" y="600791"/>
+                  </a:lnTo>
+                  <a:lnTo>
+                    <a:pt x="2936523" y="600080"/>
+                  </a:lnTo>
+                  <a:lnTo>
+                    <a:pt x="2864901" y="599368"/>
+                  </a:lnTo>
+                  <a:lnTo>
+                    <a:pt x="2793278" y="598655"/>
+                  </a:lnTo>
+                  <a:lnTo>
+                    <a:pt x="2721655" y="597941"/>
+                  </a:lnTo>
+                  <a:lnTo>
+                    <a:pt x="2650033" y="597227"/>
+                  </a:lnTo>
+                  <a:lnTo>
+                    <a:pt x="2578410" y="596512"/>
+                  </a:lnTo>
+                  <a:lnTo>
+                    <a:pt x="2506788" y="595797"/>
+                  </a:lnTo>
+                  <a:lnTo>
+                    <a:pt x="2435165" y="595081"/>
+                  </a:lnTo>
+                  <a:lnTo>
+                    <a:pt x="2363543" y="594364"/>
+                  </a:lnTo>
+                  <a:lnTo>
+                    <a:pt x="2291920" y="593647"/>
+                  </a:lnTo>
+                  <a:lnTo>
+                    <a:pt x="2220298" y="592929"/>
+                  </a:lnTo>
+                  <a:lnTo>
+                    <a:pt x="2148675" y="592211"/>
+                  </a:lnTo>
+                  <a:lnTo>
+                    <a:pt x="2077053" y="591492"/>
+                  </a:lnTo>
+                  <a:lnTo>
+                    <a:pt x="2005430" y="590772"/>
+                  </a:lnTo>
+                  <a:lnTo>
+                    <a:pt x="1933808" y="590052"/>
+                  </a:lnTo>
+                  <a:lnTo>
+                    <a:pt x="1862185" y="589331"/>
+                  </a:lnTo>
+                  <a:lnTo>
+                    <a:pt x="1790563" y="588610"/>
+                  </a:lnTo>
+                  <a:lnTo>
+                    <a:pt x="1718940" y="587887"/>
+                  </a:lnTo>
+                  <a:lnTo>
+                    <a:pt x="1647318" y="587165"/>
+                  </a:lnTo>
+                  <a:lnTo>
+                    <a:pt x="1575695" y="586441"/>
+                  </a:lnTo>
+                  <a:lnTo>
+                    <a:pt x="1504073" y="585717"/>
+                  </a:lnTo>
+                  <a:lnTo>
+                    <a:pt x="1432450" y="584993"/>
+                  </a:lnTo>
+                  <a:lnTo>
+                    <a:pt x="1360827" y="584268"/>
+                  </a:lnTo>
+                  <a:lnTo>
+                    <a:pt x="1289205" y="583542"/>
+                  </a:lnTo>
+                  <a:lnTo>
+                    <a:pt x="1217582" y="582815"/>
+                  </a:lnTo>
+                  <a:lnTo>
+                    <a:pt x="1145960" y="582088"/>
+                  </a:lnTo>
+                  <a:lnTo>
+                    <a:pt x="1074337" y="581360"/>
+                  </a:lnTo>
+                  <a:lnTo>
+                    <a:pt x="1002715" y="580632"/>
+                  </a:lnTo>
+                  <a:lnTo>
+                    <a:pt x="931092" y="579903"/>
+                  </a:lnTo>
+                  <a:lnTo>
+                    <a:pt x="859470" y="579173"/>
+                  </a:lnTo>
+                  <a:lnTo>
+                    <a:pt x="787847" y="578443"/>
+                  </a:lnTo>
+                  <a:lnTo>
+                    <a:pt x="716225" y="577712"/>
+                  </a:lnTo>
+                  <a:lnTo>
+                    <a:pt x="644602" y="576981"/>
+                  </a:lnTo>
+                  <a:lnTo>
+                    <a:pt x="572980" y="576249"/>
+                  </a:lnTo>
+                  <a:lnTo>
+                    <a:pt x="501357" y="575516"/>
+                  </a:lnTo>
+                  <a:lnTo>
+                    <a:pt x="429735" y="574783"/>
+                  </a:lnTo>
+                  <a:lnTo>
+                    <a:pt x="358112" y="574049"/>
+                  </a:lnTo>
+                  <a:lnTo>
+                    <a:pt x="286490" y="573314"/>
+                  </a:lnTo>
+                  <a:lnTo>
+                    <a:pt x="214867" y="572579"/>
+                  </a:lnTo>
+                  <a:lnTo>
+                    <a:pt x="143245" y="571843"/>
+                  </a:lnTo>
+                  <a:lnTo>
+                    <a:pt x="71622" y="571107"/>
+                  </a:lnTo>
+                  <a:lnTo>
+                    <a:pt x="0" y="570369"/>
                   </a:lnTo>
                   <a:close/>
                 </a:path>
@@ -3676,312 +3676,312 @@
           </p:nvSpPr>
           <p:spPr>
             <a:xfrm>
-              <a:off x="1172049" y="4139915"/>
-              <a:ext cx="7090630" cy="615509"/>
+              <a:off x="1172049" y="4126738"/>
+              <a:ext cx="7090630" cy="640365"/>
             </a:xfrm>
             <a:custGeom>
               <a:avLst/>
               <a:pathLst>
-                <a:path w="7090630" h="615509">
+                <a:path w="7090630" h="640365">
                   <a:moveTo>
                     <a:pt x="0" y="0"/>
                   </a:moveTo>
                   <a:lnTo>
-                    <a:pt x="71622" y="17813"/>
-                  </a:lnTo>
-                  <a:lnTo>
-                    <a:pt x="143245" y="35402"/>
-                  </a:lnTo>
-                  <a:lnTo>
-                    <a:pt x="214867" y="52770"/>
-                  </a:lnTo>
-                  <a:lnTo>
-                    <a:pt x="286490" y="69920"/>
-                  </a:lnTo>
-                  <a:lnTo>
-                    <a:pt x="358112" y="86854"/>
-                  </a:lnTo>
-                  <a:lnTo>
-                    <a:pt x="429735" y="103576"/>
-                  </a:lnTo>
-                  <a:lnTo>
-                    <a:pt x="501357" y="120087"/>
-                  </a:lnTo>
-                  <a:lnTo>
-                    <a:pt x="572980" y="136391"/>
-                  </a:lnTo>
-                  <a:lnTo>
-                    <a:pt x="644602" y="152490"/>
-                  </a:lnTo>
-                  <a:lnTo>
-                    <a:pt x="716225" y="168386"/>
-                  </a:lnTo>
-                  <a:lnTo>
-                    <a:pt x="787847" y="184083"/>
-                  </a:lnTo>
-                  <a:lnTo>
-                    <a:pt x="859470" y="199582"/>
-                  </a:lnTo>
-                  <a:lnTo>
-                    <a:pt x="931092" y="214887"/>
-                  </a:lnTo>
-                  <a:lnTo>
-                    <a:pt x="1002715" y="229999"/>
-                  </a:lnTo>
-                  <a:lnTo>
-                    <a:pt x="1074337" y="244922"/>
-                  </a:lnTo>
-                  <a:lnTo>
-                    <a:pt x="1145960" y="259657"/>
-                  </a:lnTo>
-                  <a:lnTo>
-                    <a:pt x="1217582" y="274206"/>
-                  </a:lnTo>
-                  <a:lnTo>
-                    <a:pt x="1289205" y="288573"/>
-                  </a:lnTo>
-                  <a:lnTo>
-                    <a:pt x="1360827" y="302760"/>
-                  </a:lnTo>
-                  <a:lnTo>
-                    <a:pt x="1432450" y="316768"/>
-                  </a:lnTo>
-                  <a:lnTo>
-                    <a:pt x="1504073" y="330599"/>
-                  </a:lnTo>
-                  <a:lnTo>
-                    <a:pt x="1575695" y="344258"/>
-                  </a:lnTo>
-                  <a:lnTo>
-                    <a:pt x="1647318" y="357744"/>
-                  </a:lnTo>
-                  <a:lnTo>
-                    <a:pt x="1718940" y="371061"/>
-                  </a:lnTo>
-                  <a:lnTo>
-                    <a:pt x="1790563" y="384210"/>
-                  </a:lnTo>
-                  <a:lnTo>
-                    <a:pt x="1862185" y="397195"/>
-                  </a:lnTo>
-                  <a:lnTo>
-                    <a:pt x="1933808" y="410016"/>
-                  </a:lnTo>
-                  <a:lnTo>
-                    <a:pt x="2005430" y="422676"/>
-                  </a:lnTo>
-                  <a:lnTo>
-                    <a:pt x="2077053" y="435177"/>
-                  </a:lnTo>
-                  <a:lnTo>
-                    <a:pt x="2148675" y="447520"/>
-                  </a:lnTo>
-                  <a:lnTo>
-                    <a:pt x="2220298" y="459709"/>
-                  </a:lnTo>
-                  <a:lnTo>
-                    <a:pt x="2291920" y="471745"/>
-                  </a:lnTo>
-                  <a:lnTo>
-                    <a:pt x="2363543" y="483629"/>
-                  </a:lnTo>
-                  <a:lnTo>
-                    <a:pt x="2435165" y="495363"/>
-                  </a:lnTo>
-                  <a:lnTo>
-                    <a:pt x="2506788" y="506951"/>
-                  </a:lnTo>
-                  <a:lnTo>
-                    <a:pt x="2578410" y="518393"/>
-                  </a:lnTo>
-                  <a:lnTo>
-                    <a:pt x="2650033" y="529690"/>
-                  </a:lnTo>
-                  <a:lnTo>
-                    <a:pt x="2721655" y="540846"/>
-                  </a:lnTo>
-                  <a:lnTo>
-                    <a:pt x="2793278" y="551862"/>
-                  </a:lnTo>
-                  <a:lnTo>
-                    <a:pt x="2864901" y="562739"/>
-                  </a:lnTo>
-                  <a:lnTo>
-                    <a:pt x="2936523" y="573480"/>
-                  </a:lnTo>
-                  <a:lnTo>
-                    <a:pt x="3008146" y="584085"/>
-                  </a:lnTo>
-                  <a:lnTo>
-                    <a:pt x="3079768" y="588188"/>
-                  </a:lnTo>
-                  <a:lnTo>
-                    <a:pt x="3151391" y="588684"/>
-                  </a:lnTo>
-                  <a:lnTo>
-                    <a:pt x="3223013" y="589179"/>
-                  </a:lnTo>
-                  <a:lnTo>
-                    <a:pt x="3294636" y="589675"/>
-                  </a:lnTo>
-                  <a:lnTo>
-                    <a:pt x="3366258" y="590170"/>
-                  </a:lnTo>
-                  <a:lnTo>
-                    <a:pt x="3437881" y="590664"/>
-                  </a:lnTo>
-                  <a:lnTo>
-                    <a:pt x="3509503" y="591159"/>
-                  </a:lnTo>
-                  <a:lnTo>
-                    <a:pt x="3581126" y="591653"/>
-                  </a:lnTo>
-                  <a:lnTo>
-                    <a:pt x="3652748" y="592147"/>
-                  </a:lnTo>
-                  <a:lnTo>
-                    <a:pt x="3724371" y="592641"/>
-                  </a:lnTo>
-                  <a:lnTo>
-                    <a:pt x="3795993" y="593134"/>
-                  </a:lnTo>
-                  <a:lnTo>
-                    <a:pt x="3867616" y="593627"/>
-                  </a:lnTo>
-                  <a:lnTo>
-                    <a:pt x="3939238" y="594120"/>
-                  </a:lnTo>
-                  <a:lnTo>
-                    <a:pt x="4010861" y="594612"/>
-                  </a:lnTo>
-                  <a:lnTo>
-                    <a:pt x="4082483" y="595104"/>
-                  </a:lnTo>
-                  <a:lnTo>
-                    <a:pt x="4154106" y="595596"/>
-                  </a:lnTo>
-                  <a:lnTo>
-                    <a:pt x="4225729" y="596087"/>
-                  </a:lnTo>
-                  <a:lnTo>
-                    <a:pt x="4297351" y="596579"/>
-                  </a:lnTo>
-                  <a:lnTo>
-                    <a:pt x="4368974" y="597070"/>
-                  </a:lnTo>
-                  <a:lnTo>
-                    <a:pt x="4440596" y="597560"/>
-                  </a:lnTo>
-                  <a:lnTo>
-                    <a:pt x="4512219" y="598051"/>
-                  </a:lnTo>
-                  <a:lnTo>
-                    <a:pt x="4583841" y="598541"/>
-                  </a:lnTo>
-                  <a:lnTo>
-                    <a:pt x="4655464" y="599030"/>
-                  </a:lnTo>
-                  <a:lnTo>
-                    <a:pt x="4727086" y="599520"/>
-                  </a:lnTo>
-                  <a:lnTo>
-                    <a:pt x="4798709" y="600009"/>
-                  </a:lnTo>
-                  <a:lnTo>
-                    <a:pt x="4870331" y="600498"/>
-                  </a:lnTo>
-                  <a:lnTo>
-                    <a:pt x="4941954" y="600986"/>
-                  </a:lnTo>
-                  <a:lnTo>
-                    <a:pt x="5013576" y="601475"/>
-                  </a:lnTo>
-                  <a:lnTo>
-                    <a:pt x="5085199" y="601963"/>
-                  </a:lnTo>
-                  <a:lnTo>
-                    <a:pt x="5156821" y="602450"/>
-                  </a:lnTo>
-                  <a:lnTo>
-                    <a:pt x="5228444" y="602938"/>
-                  </a:lnTo>
-                  <a:lnTo>
-                    <a:pt x="5300066" y="603425"/>
-                  </a:lnTo>
-                  <a:lnTo>
-                    <a:pt x="5371689" y="603912"/>
-                  </a:lnTo>
-                  <a:lnTo>
-                    <a:pt x="5443311" y="604398"/>
-                  </a:lnTo>
-                  <a:lnTo>
-                    <a:pt x="5514934" y="604885"/>
-                  </a:lnTo>
-                  <a:lnTo>
-                    <a:pt x="5586557" y="605371"/>
-                  </a:lnTo>
-                  <a:lnTo>
-                    <a:pt x="5658179" y="605856"/>
-                  </a:lnTo>
-                  <a:lnTo>
-                    <a:pt x="5729802" y="606342"/>
-                  </a:lnTo>
-                  <a:lnTo>
-                    <a:pt x="5801424" y="606827"/>
-                  </a:lnTo>
-                  <a:lnTo>
-                    <a:pt x="5873047" y="607312"/>
-                  </a:lnTo>
-                  <a:lnTo>
-                    <a:pt x="5944669" y="607796"/>
-                  </a:lnTo>
-                  <a:lnTo>
-                    <a:pt x="6016292" y="608280"/>
-                  </a:lnTo>
-                  <a:lnTo>
-                    <a:pt x="6087914" y="608764"/>
-                  </a:lnTo>
-                  <a:lnTo>
-                    <a:pt x="6159537" y="609248"/>
-                  </a:lnTo>
-                  <a:lnTo>
-                    <a:pt x="6231159" y="609731"/>
-                  </a:lnTo>
-                  <a:lnTo>
-                    <a:pt x="6302782" y="610214"/>
-                  </a:lnTo>
-                  <a:lnTo>
-                    <a:pt x="6374404" y="610697"/>
-                  </a:lnTo>
-                  <a:lnTo>
-                    <a:pt x="6446027" y="611180"/>
-                  </a:lnTo>
-                  <a:lnTo>
-                    <a:pt x="6517649" y="611662"/>
-                  </a:lnTo>
-                  <a:lnTo>
-                    <a:pt x="6589272" y="612144"/>
-                  </a:lnTo>
-                  <a:lnTo>
-                    <a:pt x="6660894" y="612625"/>
-                  </a:lnTo>
-                  <a:lnTo>
-                    <a:pt x="6732517" y="613107"/>
-                  </a:lnTo>
-                  <a:lnTo>
-                    <a:pt x="6804139" y="613588"/>
-                  </a:lnTo>
-                  <a:lnTo>
-                    <a:pt x="6875762" y="614068"/>
-                  </a:lnTo>
-                  <a:lnTo>
-                    <a:pt x="6947385" y="614549"/>
-                  </a:lnTo>
-                  <a:lnTo>
-                    <a:pt x="7019007" y="615029"/>
-                  </a:lnTo>
-                  <a:lnTo>
-                    <a:pt x="7090630" y="615509"/>
+                    <a:pt x="71622" y="18287"/>
+                  </a:lnTo>
+                  <a:lnTo>
+                    <a:pt x="143245" y="36340"/>
+                  </a:lnTo>
+                  <a:lnTo>
+                    <a:pt x="214867" y="54163"/>
+                  </a:lnTo>
+                  <a:lnTo>
+                    <a:pt x="286490" y="71758"/>
+                  </a:lnTo>
+                  <a:lnTo>
+                    <a:pt x="358112" y="89128"/>
+                  </a:lnTo>
+                  <a:lnTo>
+                    <a:pt x="429735" y="106275"/>
+                  </a:lnTo>
+                  <a:lnTo>
+                    <a:pt x="501357" y="123204"/>
+                  </a:lnTo>
+                  <a:lnTo>
+                    <a:pt x="572980" y="139916"/>
+                  </a:lnTo>
+                  <a:lnTo>
+                    <a:pt x="644602" y="156415"/>
+                  </a:lnTo>
+                  <a:lnTo>
+                    <a:pt x="716225" y="172703"/>
+                  </a:lnTo>
+                  <a:lnTo>
+                    <a:pt x="787847" y="188782"/>
+                  </a:lnTo>
+                  <a:lnTo>
+                    <a:pt x="859470" y="204656"/>
+                  </a:lnTo>
+                  <a:lnTo>
+                    <a:pt x="931092" y="220327"/>
+                  </a:lnTo>
+                  <a:lnTo>
+                    <a:pt x="1002715" y="235798"/>
+                  </a:lnTo>
+                  <a:lnTo>
+                    <a:pt x="1074337" y="251070"/>
+                  </a:lnTo>
+                  <a:lnTo>
+                    <a:pt x="1145960" y="266148"/>
+                  </a:lnTo>
+                  <a:lnTo>
+                    <a:pt x="1217582" y="281033"/>
+                  </a:lnTo>
+                  <a:lnTo>
+                    <a:pt x="1289205" y="295728"/>
+                  </a:lnTo>
+                  <a:lnTo>
+                    <a:pt x="1360827" y="310234"/>
+                  </a:lnTo>
+                  <a:lnTo>
+                    <a:pt x="1432450" y="324556"/>
+                  </a:lnTo>
+                  <a:lnTo>
+                    <a:pt x="1504073" y="338694"/>
+                  </a:lnTo>
+                  <a:lnTo>
+                    <a:pt x="1575695" y="352651"/>
+                  </a:lnTo>
+                  <a:lnTo>
+                    <a:pt x="1647318" y="366430"/>
+                  </a:lnTo>
+                  <a:lnTo>
+                    <a:pt x="1718940" y="380033"/>
+                  </a:lnTo>
+                  <a:lnTo>
+                    <a:pt x="1790563" y="393462"/>
+                  </a:lnTo>
+                  <a:lnTo>
+                    <a:pt x="1862185" y="406720"/>
+                  </a:lnTo>
+                  <a:lnTo>
+                    <a:pt x="1933808" y="419807"/>
+                  </a:lnTo>
+                  <a:lnTo>
+                    <a:pt x="2005430" y="432728"/>
+                  </a:lnTo>
+                  <a:lnTo>
+                    <a:pt x="2077053" y="445483"/>
+                  </a:lnTo>
+                  <a:lnTo>
+                    <a:pt x="2148675" y="458076"/>
+                  </a:lnTo>
+                  <a:lnTo>
+                    <a:pt x="2220298" y="470507"/>
+                  </a:lnTo>
+                  <a:lnTo>
+                    <a:pt x="2291920" y="482779"/>
+                  </a:lnTo>
+                  <a:lnTo>
+                    <a:pt x="2363543" y="494895"/>
+                  </a:lnTo>
+                  <a:lnTo>
+                    <a:pt x="2435165" y="506856"/>
+                  </a:lnTo>
+                  <a:lnTo>
+                    <a:pt x="2506788" y="518663"/>
+                  </a:lnTo>
+                  <a:lnTo>
+                    <a:pt x="2578410" y="530320"/>
+                  </a:lnTo>
+                  <a:lnTo>
+                    <a:pt x="2650033" y="541828"/>
+                  </a:lnTo>
+                  <a:lnTo>
+                    <a:pt x="2721655" y="553189"/>
+                  </a:lnTo>
+                  <a:lnTo>
+                    <a:pt x="2793278" y="564404"/>
+                  </a:lnTo>
+                  <a:lnTo>
+                    <a:pt x="2864901" y="575476"/>
+                  </a:lnTo>
+                  <a:lnTo>
+                    <a:pt x="2936523" y="586407"/>
+                  </a:lnTo>
+                  <a:lnTo>
+                    <a:pt x="3008146" y="597197"/>
+                  </a:lnTo>
+                  <a:lnTo>
+                    <a:pt x="3079768" y="601503"/>
+                  </a:lnTo>
+                  <a:lnTo>
+                    <a:pt x="3151391" y="602213"/>
+                  </a:lnTo>
+                  <a:lnTo>
+                    <a:pt x="3223013" y="602923"/>
+                  </a:lnTo>
+                  <a:lnTo>
+                    <a:pt x="3294636" y="603632"/>
+                  </a:lnTo>
+                  <a:lnTo>
+                    <a:pt x="3366258" y="604341"/>
+                  </a:lnTo>
+                  <a:lnTo>
+                    <a:pt x="3437881" y="605049"/>
+                  </a:lnTo>
+                  <a:lnTo>
+                    <a:pt x="3509503" y="605756"/>
+                  </a:lnTo>
+                  <a:lnTo>
+                    <a:pt x="3581126" y="606463"/>
+                  </a:lnTo>
+                  <a:lnTo>
+                    <a:pt x="3652748" y="607169"/>
+                  </a:lnTo>
+                  <a:lnTo>
+                    <a:pt x="3724371" y="607875"/>
+                  </a:lnTo>
+                  <a:lnTo>
+                    <a:pt x="3795993" y="608580"/>
+                  </a:lnTo>
+                  <a:lnTo>
+                    <a:pt x="3867616" y="609284"/>
+                  </a:lnTo>
+                  <a:lnTo>
+                    <a:pt x="3939238" y="609988"/>
+                  </a:lnTo>
+                  <a:lnTo>
+                    <a:pt x="4010861" y="610691"/>
+                  </a:lnTo>
+                  <a:lnTo>
+                    <a:pt x="4082483" y="611394"/>
+                  </a:lnTo>
+                  <a:lnTo>
+                    <a:pt x="4154106" y="612096"/>
+                  </a:lnTo>
+                  <a:lnTo>
+                    <a:pt x="4225729" y="612797"/>
+                  </a:lnTo>
+                  <a:lnTo>
+                    <a:pt x="4297351" y="613498"/>
+                  </a:lnTo>
+                  <a:lnTo>
+                    <a:pt x="4368974" y="614198"/>
+                  </a:lnTo>
+                  <a:lnTo>
+                    <a:pt x="4440596" y="614898"/>
+                  </a:lnTo>
+                  <a:lnTo>
+                    <a:pt x="4512219" y="615597"/>
+                  </a:lnTo>
+                  <a:lnTo>
+                    <a:pt x="4583841" y="616295"/>
+                  </a:lnTo>
+                  <a:lnTo>
+                    <a:pt x="4655464" y="616993"/>
+                  </a:lnTo>
+                  <a:lnTo>
+                    <a:pt x="4727086" y="617690"/>
+                  </a:lnTo>
+                  <a:lnTo>
+                    <a:pt x="4798709" y="618387"/>
+                  </a:lnTo>
+                  <a:lnTo>
+                    <a:pt x="4870331" y="619083"/>
+                  </a:lnTo>
+                  <a:lnTo>
+                    <a:pt x="4941954" y="619778"/>
+                  </a:lnTo>
+                  <a:lnTo>
+                    <a:pt x="5013576" y="620473"/>
+                  </a:lnTo>
+                  <a:lnTo>
+                    <a:pt x="5085199" y="621167"/>
+                  </a:lnTo>
+                  <a:lnTo>
+                    <a:pt x="5156821" y="621861"/>
+                  </a:lnTo>
+                  <a:lnTo>
+                    <a:pt x="5228444" y="622554"/>
+                  </a:lnTo>
+                  <a:lnTo>
+                    <a:pt x="5300066" y="623246"/>
+                  </a:lnTo>
+                  <a:lnTo>
+                    <a:pt x="5371689" y="623938"/>
+                  </a:lnTo>
+                  <a:lnTo>
+                    <a:pt x="5443311" y="624629"/>
+                  </a:lnTo>
+                  <a:lnTo>
+                    <a:pt x="5514934" y="625320"/>
+                  </a:lnTo>
+                  <a:lnTo>
+                    <a:pt x="5586557" y="626010"/>
+                  </a:lnTo>
+                  <a:lnTo>
+                    <a:pt x="5658179" y="626699"/>
+                  </a:lnTo>
+                  <a:lnTo>
+                    <a:pt x="5729802" y="627388"/>
+                  </a:lnTo>
+                  <a:lnTo>
+                    <a:pt x="5801424" y="628076"/>
+                  </a:lnTo>
+                  <a:lnTo>
+                    <a:pt x="5873047" y="628764"/>
+                  </a:lnTo>
+                  <a:lnTo>
+                    <a:pt x="5944669" y="629451"/>
+                  </a:lnTo>
+                  <a:lnTo>
+                    <a:pt x="6016292" y="630138"/>
+                  </a:lnTo>
+                  <a:lnTo>
+                    <a:pt x="6087914" y="630823"/>
+                  </a:lnTo>
+                  <a:lnTo>
+                    <a:pt x="6159537" y="631509"/>
+                  </a:lnTo>
+                  <a:lnTo>
+                    <a:pt x="6231159" y="632194"/>
+                  </a:lnTo>
+                  <a:lnTo>
+                    <a:pt x="6302782" y="632878"/>
+                  </a:lnTo>
+                  <a:lnTo>
+                    <a:pt x="6374404" y="633561"/>
+                  </a:lnTo>
+                  <a:lnTo>
+                    <a:pt x="6446027" y="634244"/>
+                  </a:lnTo>
+                  <a:lnTo>
+                    <a:pt x="6517649" y="634927"/>
+                  </a:lnTo>
+                  <a:lnTo>
+                    <a:pt x="6589272" y="635608"/>
+                  </a:lnTo>
+                  <a:lnTo>
+                    <a:pt x="6660894" y="636290"/>
+                  </a:lnTo>
+                  <a:lnTo>
+                    <a:pt x="6732517" y="636970"/>
+                  </a:lnTo>
+                  <a:lnTo>
+                    <a:pt x="6804139" y="637650"/>
+                  </a:lnTo>
+                  <a:lnTo>
+                    <a:pt x="6875762" y="638330"/>
+                  </a:lnTo>
+                  <a:lnTo>
+                    <a:pt x="6947385" y="639009"/>
+                  </a:lnTo>
+                  <a:lnTo>
+                    <a:pt x="7019007" y="639687"/>
+                  </a:lnTo>
+                  <a:lnTo>
+                    <a:pt x="7090630" y="640365"/>
                   </a:lnTo>
                 </a:path>
               </a:pathLst>
@@ -4001,309 +4001,309 @@
           </p:nvSpPr>
           <p:spPr>
             <a:xfrm>
-              <a:off x="1172049" y="4706494"/>
-              <a:ext cx="7090630" cy="445541"/>
+              <a:off x="1172049" y="4697108"/>
+              <a:ext cx="7090630" cy="459910"/>
             </a:xfrm>
             <a:custGeom>
               <a:avLst/>
               <a:pathLst>
-                <a:path w="7090630" h="445541">
+                <a:path w="7090630" h="459910">
                   <a:moveTo>
-                    <a:pt x="7090630" y="445541"/>
+                    <a:pt x="7090630" y="459910"/>
                   </a:moveTo>
                   <a:lnTo>
-                    <a:pt x="7019007" y="440383"/>
-                  </a:lnTo>
-                  <a:lnTo>
-                    <a:pt x="6947385" y="435160"/>
-                  </a:lnTo>
-                  <a:lnTo>
-                    <a:pt x="6875762" y="429870"/>
-                  </a:lnTo>
-                  <a:lnTo>
-                    <a:pt x="6804139" y="424513"/>
-                  </a:lnTo>
-                  <a:lnTo>
-                    <a:pt x="6732517" y="419088"/>
-                  </a:lnTo>
-                  <a:lnTo>
-                    <a:pt x="6660894" y="413594"/>
-                  </a:lnTo>
-                  <a:lnTo>
-                    <a:pt x="6589272" y="408029"/>
-                  </a:lnTo>
-                  <a:lnTo>
-                    <a:pt x="6517649" y="402395"/>
-                  </a:lnTo>
-                  <a:lnTo>
-                    <a:pt x="6446027" y="396688"/>
-                  </a:lnTo>
-                  <a:lnTo>
-                    <a:pt x="6374404" y="390908"/>
-                  </a:lnTo>
-                  <a:lnTo>
-                    <a:pt x="6302782" y="385056"/>
-                  </a:lnTo>
-                  <a:lnTo>
-                    <a:pt x="6231159" y="379128"/>
-                  </a:lnTo>
-                  <a:lnTo>
-                    <a:pt x="6159537" y="373125"/>
-                  </a:lnTo>
-                  <a:lnTo>
-                    <a:pt x="6087914" y="367046"/>
-                  </a:lnTo>
-                  <a:lnTo>
-                    <a:pt x="6016292" y="360889"/>
-                  </a:lnTo>
-                  <a:lnTo>
-                    <a:pt x="5944669" y="354654"/>
-                  </a:lnTo>
-                  <a:lnTo>
-                    <a:pt x="5873047" y="348340"/>
-                  </a:lnTo>
-                  <a:lnTo>
-                    <a:pt x="5801424" y="341945"/>
-                  </a:lnTo>
-                  <a:lnTo>
-                    <a:pt x="5729802" y="335469"/>
-                  </a:lnTo>
-                  <a:lnTo>
-                    <a:pt x="5658179" y="328911"/>
-                  </a:lnTo>
-                  <a:lnTo>
-                    <a:pt x="5586557" y="322269"/>
-                  </a:lnTo>
-                  <a:lnTo>
-                    <a:pt x="5514934" y="315542"/>
-                  </a:lnTo>
-                  <a:lnTo>
-                    <a:pt x="5443311" y="308730"/>
-                  </a:lnTo>
-                  <a:lnTo>
-                    <a:pt x="5371689" y="301831"/>
-                  </a:lnTo>
-                  <a:lnTo>
-                    <a:pt x="5300066" y="294844"/>
-                  </a:lnTo>
-                  <a:lnTo>
-                    <a:pt x="5228444" y="287769"/>
-                  </a:lnTo>
-                  <a:lnTo>
-                    <a:pt x="5156821" y="280603"/>
-                  </a:lnTo>
-                  <a:lnTo>
-                    <a:pt x="5085199" y="273346"/>
-                  </a:lnTo>
-                  <a:lnTo>
-                    <a:pt x="5013576" y="265997"/>
-                  </a:lnTo>
-                  <a:lnTo>
-                    <a:pt x="4941954" y="258554"/>
-                  </a:lnTo>
-                  <a:lnTo>
-                    <a:pt x="4870331" y="251017"/>
-                  </a:lnTo>
-                  <a:lnTo>
-                    <a:pt x="4798709" y="243383"/>
-                  </a:lnTo>
-                  <a:lnTo>
-                    <a:pt x="4727086" y="235653"/>
-                  </a:lnTo>
-                  <a:lnTo>
-                    <a:pt x="4655464" y="227824"/>
-                  </a:lnTo>
-                  <a:lnTo>
-                    <a:pt x="4583841" y="219895"/>
-                  </a:lnTo>
-                  <a:lnTo>
-                    <a:pt x="4512219" y="211865"/>
-                  </a:lnTo>
-                  <a:lnTo>
-                    <a:pt x="4440596" y="203734"/>
-                  </a:lnTo>
-                  <a:lnTo>
-                    <a:pt x="4368974" y="195498"/>
-                  </a:lnTo>
-                  <a:lnTo>
-                    <a:pt x="4297351" y="187158"/>
-                  </a:lnTo>
-                  <a:lnTo>
-                    <a:pt x="4225729" y="178712"/>
-                  </a:lnTo>
-                  <a:lnTo>
-                    <a:pt x="4154106" y="170158"/>
-                  </a:lnTo>
-                  <a:lnTo>
-                    <a:pt x="4082483" y="161496"/>
-                  </a:lnTo>
-                  <a:lnTo>
-                    <a:pt x="4010861" y="152723"/>
-                  </a:lnTo>
-                  <a:lnTo>
-                    <a:pt x="3939238" y="143838"/>
-                  </a:lnTo>
-                  <a:lnTo>
-                    <a:pt x="3867616" y="134841"/>
-                  </a:lnTo>
-                  <a:lnTo>
-                    <a:pt x="3795993" y="125729"/>
-                  </a:lnTo>
-                  <a:lnTo>
-                    <a:pt x="3724371" y="116501"/>
-                  </a:lnTo>
-                  <a:lnTo>
-                    <a:pt x="3652748" y="107155"/>
-                  </a:lnTo>
-                  <a:lnTo>
-                    <a:pt x="3581126" y="97690"/>
-                  </a:lnTo>
-                  <a:lnTo>
-                    <a:pt x="3509503" y="88105"/>
-                  </a:lnTo>
-                  <a:lnTo>
-                    <a:pt x="3437881" y="78398"/>
-                  </a:lnTo>
-                  <a:lnTo>
-                    <a:pt x="3366258" y="68568"/>
-                  </a:lnTo>
-                  <a:lnTo>
-                    <a:pt x="3294636" y="58612"/>
-                  </a:lnTo>
-                  <a:lnTo>
-                    <a:pt x="3223013" y="48530"/>
-                  </a:lnTo>
-                  <a:lnTo>
-                    <a:pt x="3151391" y="38319"/>
-                  </a:lnTo>
-                  <a:lnTo>
-                    <a:pt x="3079768" y="27979"/>
-                  </a:lnTo>
-                  <a:lnTo>
-                    <a:pt x="3008146" y="21112"/>
-                  </a:lnTo>
-                  <a:lnTo>
-                    <a:pt x="2936523" y="20616"/>
-                  </a:lnTo>
-                  <a:lnTo>
-                    <a:pt x="2864901" y="20119"/>
-                  </a:lnTo>
-                  <a:lnTo>
-                    <a:pt x="2793278" y="19622"/>
-                  </a:lnTo>
-                  <a:lnTo>
-                    <a:pt x="2721655" y="19124"/>
-                  </a:lnTo>
-                  <a:lnTo>
-                    <a:pt x="2650033" y="18627"/>
-                  </a:lnTo>
-                  <a:lnTo>
-                    <a:pt x="2578410" y="18129"/>
-                  </a:lnTo>
-                  <a:lnTo>
-                    <a:pt x="2506788" y="17630"/>
-                  </a:lnTo>
-                  <a:lnTo>
-                    <a:pt x="2435165" y="17132"/>
-                  </a:lnTo>
-                  <a:lnTo>
-                    <a:pt x="2363543" y="16633"/>
-                  </a:lnTo>
-                  <a:lnTo>
-                    <a:pt x="2291920" y="16133"/>
-                  </a:lnTo>
-                  <a:lnTo>
-                    <a:pt x="2220298" y="15634"/>
-                  </a:lnTo>
-                  <a:lnTo>
-                    <a:pt x="2148675" y="15134"/>
-                  </a:lnTo>
-                  <a:lnTo>
-                    <a:pt x="2077053" y="14634"/>
-                  </a:lnTo>
-                  <a:lnTo>
-                    <a:pt x="2005430" y="14134"/>
-                  </a:lnTo>
-                  <a:lnTo>
-                    <a:pt x="1933808" y="13633"/>
-                  </a:lnTo>
-                  <a:lnTo>
-                    <a:pt x="1862185" y="13132"/>
-                  </a:lnTo>
-                  <a:lnTo>
-                    <a:pt x="1790563" y="12631"/>
-                  </a:lnTo>
-                  <a:lnTo>
-                    <a:pt x="1718940" y="12129"/>
-                  </a:lnTo>
-                  <a:lnTo>
-                    <a:pt x="1647318" y="11627"/>
-                  </a:lnTo>
-                  <a:lnTo>
-                    <a:pt x="1575695" y="11125"/>
-                  </a:lnTo>
-                  <a:lnTo>
-                    <a:pt x="1504073" y="10622"/>
-                  </a:lnTo>
-                  <a:lnTo>
-                    <a:pt x="1432450" y="10119"/>
-                  </a:lnTo>
-                  <a:lnTo>
-                    <a:pt x="1360827" y="9616"/>
-                  </a:lnTo>
-                  <a:lnTo>
-                    <a:pt x="1289205" y="9113"/>
-                  </a:lnTo>
-                  <a:lnTo>
-                    <a:pt x="1217582" y="8609"/>
-                  </a:lnTo>
-                  <a:lnTo>
-                    <a:pt x="1145960" y="8105"/>
-                  </a:lnTo>
-                  <a:lnTo>
-                    <a:pt x="1074337" y="7601"/>
-                  </a:lnTo>
-                  <a:lnTo>
-                    <a:pt x="1002715" y="7096"/>
-                  </a:lnTo>
-                  <a:lnTo>
-                    <a:pt x="931092" y="6591"/>
-                  </a:lnTo>
-                  <a:lnTo>
-                    <a:pt x="859470" y="6086"/>
-                  </a:lnTo>
-                  <a:lnTo>
-                    <a:pt x="787847" y="5580"/>
-                  </a:lnTo>
-                  <a:lnTo>
-                    <a:pt x="716225" y="5075"/>
-                  </a:lnTo>
-                  <a:lnTo>
-                    <a:pt x="644602" y="4568"/>
-                  </a:lnTo>
-                  <a:lnTo>
-                    <a:pt x="572980" y="4062"/>
-                  </a:lnTo>
-                  <a:lnTo>
-                    <a:pt x="501357" y="3555"/>
-                  </a:lnTo>
-                  <a:lnTo>
-                    <a:pt x="429735" y="3048"/>
-                  </a:lnTo>
-                  <a:lnTo>
-                    <a:pt x="358112" y="2541"/>
-                  </a:lnTo>
-                  <a:lnTo>
-                    <a:pt x="286490" y="2033"/>
-                  </a:lnTo>
-                  <a:lnTo>
-                    <a:pt x="214867" y="1525"/>
-                  </a:lnTo>
-                  <a:lnTo>
-                    <a:pt x="143245" y="1017"/>
-                  </a:lnTo>
-                  <a:lnTo>
-                    <a:pt x="71622" y="508"/>
+                    <a:pt x="7019007" y="454728"/>
+                  </a:lnTo>
+                  <a:lnTo>
+                    <a:pt x="6947385" y="449478"/>
+                  </a:lnTo>
+                  <a:lnTo>
+                    <a:pt x="6875762" y="444160"/>
+                  </a:lnTo>
+                  <a:lnTo>
+                    <a:pt x="6804139" y="438774"/>
+                  </a:lnTo>
+                  <a:lnTo>
+                    <a:pt x="6732517" y="433317"/>
+                  </a:lnTo>
+                  <a:lnTo>
+                    <a:pt x="6660894" y="427790"/>
+                  </a:lnTo>
+                  <a:lnTo>
+                    <a:pt x="6589272" y="422191"/>
+                  </a:lnTo>
+                  <a:lnTo>
+                    <a:pt x="6517649" y="416520"/>
+                  </a:lnTo>
+                  <a:lnTo>
+                    <a:pt x="6446027" y="410776"/>
+                  </a:lnTo>
+                  <a:lnTo>
+                    <a:pt x="6374404" y="404957"/>
+                  </a:lnTo>
+                  <a:lnTo>
+                    <a:pt x="6302782" y="399063"/>
+                  </a:lnTo>
+                  <a:lnTo>
+                    <a:pt x="6231159" y="393092"/>
+                  </a:lnTo>
+                  <a:lnTo>
+                    <a:pt x="6159537" y="387044"/>
+                  </a:lnTo>
+                  <a:lnTo>
+                    <a:pt x="6087914" y="380918"/>
+                  </a:lnTo>
+                  <a:lnTo>
+                    <a:pt x="6016292" y="374712"/>
+                  </a:lnTo>
+                  <a:lnTo>
+                    <a:pt x="5944669" y="368426"/>
+                  </a:lnTo>
+                  <a:lnTo>
+                    <a:pt x="5873047" y="362059"/>
+                  </a:lnTo>
+                  <a:lnTo>
+                    <a:pt x="5801424" y="355609"/>
+                  </a:lnTo>
+                  <a:lnTo>
+                    <a:pt x="5729802" y="349076"/>
+                  </a:lnTo>
+                  <a:lnTo>
+                    <a:pt x="5658179" y="342458"/>
+                  </a:lnTo>
+                  <a:lnTo>
+                    <a:pt x="5586557" y="335754"/>
+                  </a:lnTo>
+                  <a:lnTo>
+                    <a:pt x="5514934" y="328964"/>
+                  </a:lnTo>
+                  <a:lnTo>
+                    <a:pt x="5443311" y="322085"/>
+                  </a:lnTo>
+                  <a:lnTo>
+                    <a:pt x="5371689" y="315118"/>
+                  </a:lnTo>
+                  <a:lnTo>
+                    <a:pt x="5300066" y="308060"/>
+                  </a:lnTo>
+                  <a:lnTo>
+                    <a:pt x="5228444" y="300911"/>
+                  </a:lnTo>
+                  <a:lnTo>
+                    <a:pt x="5156821" y="293670"/>
+                  </a:lnTo>
+                  <a:lnTo>
+                    <a:pt x="5085199" y="286334"/>
+                  </a:lnTo>
+                  <a:lnTo>
+                    <a:pt x="5013576" y="278904"/>
+                  </a:lnTo>
+                  <a:lnTo>
+                    <a:pt x="4941954" y="271377"/>
+                  </a:lnTo>
+                  <a:lnTo>
+                    <a:pt x="4870331" y="263753"/>
+                  </a:lnTo>
+                  <a:lnTo>
+                    <a:pt x="4798709" y="256031"/>
+                  </a:lnTo>
+                  <a:lnTo>
+                    <a:pt x="4727086" y="248208"/>
+                  </a:lnTo>
+                  <a:lnTo>
+                    <a:pt x="4655464" y="240284"/>
+                  </a:lnTo>
+                  <a:lnTo>
+                    <a:pt x="4583841" y="232257"/>
+                  </a:lnTo>
+                  <a:lnTo>
+                    <a:pt x="4512219" y="224126"/>
+                  </a:lnTo>
+                  <a:lnTo>
+                    <a:pt x="4440596" y="215891"/>
+                  </a:lnTo>
+                  <a:lnTo>
+                    <a:pt x="4368974" y="207548"/>
+                  </a:lnTo>
+                  <a:lnTo>
+                    <a:pt x="4297351" y="199097"/>
+                  </a:lnTo>
+                  <a:lnTo>
+                    <a:pt x="4225729" y="190537"/>
+                  </a:lnTo>
+                  <a:lnTo>
+                    <a:pt x="4154106" y="181867"/>
+                  </a:lnTo>
+                  <a:lnTo>
+                    <a:pt x="4082483" y="173083"/>
+                  </a:lnTo>
+                  <a:lnTo>
+                    <a:pt x="4010861" y="164187"/>
+                  </a:lnTo>
+                  <a:lnTo>
+                    <a:pt x="3939238" y="155174"/>
+                  </a:lnTo>
+                  <a:lnTo>
+                    <a:pt x="3867616" y="146046"/>
+                  </a:lnTo>
+                  <a:lnTo>
+                    <a:pt x="3795993" y="136799"/>
+                  </a:lnTo>
+                  <a:lnTo>
+                    <a:pt x="3724371" y="127432"/>
+                  </a:lnTo>
+                  <a:lnTo>
+                    <a:pt x="3652748" y="117944"/>
+                  </a:lnTo>
+                  <a:lnTo>
+                    <a:pt x="3581126" y="108333"/>
+                  </a:lnTo>
+                  <a:lnTo>
+                    <a:pt x="3509503" y="98598"/>
+                  </a:lnTo>
+                  <a:lnTo>
+                    <a:pt x="3437881" y="88736"/>
+                  </a:lnTo>
+                  <a:lnTo>
+                    <a:pt x="3366258" y="78747"/>
+                  </a:lnTo>
+                  <a:lnTo>
+                    <a:pt x="3294636" y="68629"/>
+                  </a:lnTo>
+                  <a:lnTo>
+                    <a:pt x="3223013" y="58379"/>
+                  </a:lnTo>
+                  <a:lnTo>
+                    <a:pt x="3151391" y="47997"/>
+                  </a:lnTo>
+                  <a:lnTo>
+                    <a:pt x="3079768" y="37480"/>
+                  </a:lnTo>
+                  <a:lnTo>
+                    <a:pt x="3008146" y="30422"/>
+                  </a:lnTo>
+                  <a:lnTo>
+                    <a:pt x="2936523" y="29710"/>
+                  </a:lnTo>
+                  <a:lnTo>
+                    <a:pt x="2864901" y="28998"/>
+                  </a:lnTo>
+                  <a:lnTo>
+                    <a:pt x="2793278" y="28285"/>
+                  </a:lnTo>
+                  <a:lnTo>
+                    <a:pt x="2721655" y="27571"/>
+                  </a:lnTo>
+                  <a:lnTo>
+                    <a:pt x="2650033" y="26857"/>
+                  </a:lnTo>
+                  <a:lnTo>
+                    <a:pt x="2578410" y="26142"/>
+                  </a:lnTo>
+                  <a:lnTo>
+                    <a:pt x="2506788" y="25427"/>
+                  </a:lnTo>
+                  <a:lnTo>
+                    <a:pt x="2435165" y="24711"/>
+                  </a:lnTo>
+                  <a:lnTo>
+                    <a:pt x="2363543" y="23994"/>
+                  </a:lnTo>
+                  <a:lnTo>
+                    <a:pt x="2291920" y="23277"/>
+                  </a:lnTo>
+                  <a:lnTo>
+                    <a:pt x="2220298" y="22559"/>
+                  </a:lnTo>
+                  <a:lnTo>
+                    <a:pt x="2148675" y="21841"/>
+                  </a:lnTo>
+                  <a:lnTo>
+                    <a:pt x="2077053" y="21122"/>
+                  </a:lnTo>
+                  <a:lnTo>
+                    <a:pt x="2005430" y="20402"/>
+                  </a:lnTo>
+                  <a:lnTo>
+                    <a:pt x="1933808" y="19682"/>
+                  </a:lnTo>
+                  <a:lnTo>
+                    <a:pt x="1862185" y="18961"/>
+                  </a:lnTo>
+                  <a:lnTo>
+                    <a:pt x="1790563" y="18240"/>
+                  </a:lnTo>
+                  <a:lnTo>
+                    <a:pt x="1718940" y="17518"/>
+                  </a:lnTo>
+                  <a:lnTo>
+                    <a:pt x="1647318" y="16795"/>
+                  </a:lnTo>
+                  <a:lnTo>
+                    <a:pt x="1575695" y="16071"/>
+                  </a:lnTo>
+                  <a:lnTo>
+                    <a:pt x="1504073" y="15347"/>
+                  </a:lnTo>
+                  <a:lnTo>
+                    <a:pt x="1432450" y="14623"/>
+                  </a:lnTo>
+                  <a:lnTo>
+                    <a:pt x="1360827" y="13898"/>
+                  </a:lnTo>
+                  <a:lnTo>
+                    <a:pt x="1289205" y="13172"/>
+                  </a:lnTo>
+                  <a:lnTo>
+                    <a:pt x="1217582" y="12445"/>
+                  </a:lnTo>
+                  <a:lnTo>
+                    <a:pt x="1145960" y="11718"/>
+                  </a:lnTo>
+                  <a:lnTo>
+                    <a:pt x="1074337" y="10990"/>
+                  </a:lnTo>
+                  <a:lnTo>
+                    <a:pt x="1002715" y="10262"/>
+                  </a:lnTo>
+                  <a:lnTo>
+                    <a:pt x="931092" y="9533"/>
+                  </a:lnTo>
+                  <a:lnTo>
+                    <a:pt x="859470" y="8804"/>
+                  </a:lnTo>
+                  <a:lnTo>
+                    <a:pt x="787847" y="8073"/>
+                  </a:lnTo>
+                  <a:lnTo>
+                    <a:pt x="716225" y="7343"/>
+                  </a:lnTo>
+                  <a:lnTo>
+                    <a:pt x="644602" y="6611"/>
+                  </a:lnTo>
+                  <a:lnTo>
+                    <a:pt x="572980" y="5879"/>
+                  </a:lnTo>
+                  <a:lnTo>
+                    <a:pt x="501357" y="5146"/>
+                  </a:lnTo>
+                  <a:lnTo>
+                    <a:pt x="429735" y="4413"/>
+                  </a:lnTo>
+                  <a:lnTo>
+                    <a:pt x="358112" y="3679"/>
+                  </a:lnTo>
+                  <a:lnTo>
+                    <a:pt x="286490" y="2944"/>
+                  </a:lnTo>
+                  <a:lnTo>
+                    <a:pt x="214867" y="2209"/>
+                  </a:lnTo>
+                  <a:lnTo>
+                    <a:pt x="143245" y="1473"/>
+                  </a:lnTo>
+                  <a:lnTo>
+                    <a:pt x="71622" y="737"/>
                   </a:lnTo>
                   <a:lnTo>
                     <a:pt x="0" y="0"/>
@@ -4326,312 +4326,312 @@
           </p:nvSpPr>
           <p:spPr>
             <a:xfrm>
-              <a:off x="1172049" y="4459158"/>
-              <a:ext cx="7090630" cy="528081"/>
+              <a:off x="1172049" y="4447996"/>
+              <a:ext cx="7090630" cy="546900"/>
             </a:xfrm>
             <a:custGeom>
               <a:avLst/>
               <a:pathLst>
-                <a:path w="7090630" h="528081">
+                <a:path w="7090630" h="546900">
                   <a:moveTo>
                     <a:pt x="0" y="0"/>
                   </a:moveTo>
                   <a:lnTo>
-                    <a:pt x="71622" y="7248"/>
-                  </a:lnTo>
-                  <a:lnTo>
-                    <a:pt x="143245" y="14449"/>
-                  </a:lnTo>
-                  <a:lnTo>
-                    <a:pt x="214867" y="21602"/>
-                  </a:lnTo>
-                  <a:lnTo>
-                    <a:pt x="286490" y="28708"/>
-                  </a:lnTo>
-                  <a:lnTo>
-                    <a:pt x="358112" y="35767"/>
-                  </a:lnTo>
-                  <a:lnTo>
-                    <a:pt x="429735" y="42780"/>
-                  </a:lnTo>
-                  <a:lnTo>
-                    <a:pt x="501357" y="49746"/>
-                  </a:lnTo>
-                  <a:lnTo>
-                    <a:pt x="572980" y="56666"/>
-                  </a:lnTo>
-                  <a:lnTo>
-                    <a:pt x="644602" y="63541"/>
-                  </a:lnTo>
-                  <a:lnTo>
-                    <a:pt x="716225" y="70370"/>
-                  </a:lnTo>
-                  <a:lnTo>
-                    <a:pt x="787847" y="77154"/>
-                  </a:lnTo>
-                  <a:lnTo>
-                    <a:pt x="859470" y="83893"/>
-                  </a:lnTo>
-                  <a:lnTo>
-                    <a:pt x="931092" y="90588"/>
-                  </a:lnTo>
-                  <a:lnTo>
-                    <a:pt x="1002715" y="97239"/>
-                  </a:lnTo>
-                  <a:lnTo>
-                    <a:pt x="1074337" y="103846"/>
-                  </a:lnTo>
-                  <a:lnTo>
-                    <a:pt x="1145960" y="110409"/>
-                  </a:lnTo>
-                  <a:lnTo>
-                    <a:pt x="1217582" y="116928"/>
-                  </a:lnTo>
-                  <a:lnTo>
-                    <a:pt x="1289205" y="123405"/>
-                  </a:lnTo>
-                  <a:lnTo>
-                    <a:pt x="1360827" y="129839"/>
-                  </a:lnTo>
-                  <a:lnTo>
-                    <a:pt x="1432450" y="136231"/>
-                  </a:lnTo>
-                  <a:lnTo>
-                    <a:pt x="1504073" y="142580"/>
-                  </a:lnTo>
-                  <a:lnTo>
-                    <a:pt x="1575695" y="148887"/>
-                  </a:lnTo>
-                  <a:lnTo>
-                    <a:pt x="1647318" y="155153"/>
-                  </a:lnTo>
-                  <a:lnTo>
-                    <a:pt x="1718940" y="161378"/>
-                  </a:lnTo>
-                  <a:lnTo>
-                    <a:pt x="1790563" y="167561"/>
-                  </a:lnTo>
-                  <a:lnTo>
-                    <a:pt x="1862185" y="173704"/>
-                  </a:lnTo>
-                  <a:lnTo>
-                    <a:pt x="1933808" y="179806"/>
-                  </a:lnTo>
-                  <a:lnTo>
-                    <a:pt x="2005430" y="185867"/>
-                  </a:lnTo>
-                  <a:lnTo>
-                    <a:pt x="2077053" y="191889"/>
-                  </a:lnTo>
-                  <a:lnTo>
-                    <a:pt x="2148675" y="197871"/>
-                  </a:lnTo>
-                  <a:lnTo>
-                    <a:pt x="2220298" y="203813"/>
-                  </a:lnTo>
-                  <a:lnTo>
-                    <a:pt x="2291920" y="209717"/>
-                  </a:lnTo>
-                  <a:lnTo>
-                    <a:pt x="2363543" y="215581"/>
-                  </a:lnTo>
-                  <a:lnTo>
-                    <a:pt x="2435165" y="221406"/>
-                  </a:lnTo>
-                  <a:lnTo>
-                    <a:pt x="2506788" y="227193"/>
-                  </a:lnTo>
-                  <a:lnTo>
-                    <a:pt x="2578410" y="232942"/>
-                  </a:lnTo>
-                  <a:lnTo>
-                    <a:pt x="2650033" y="238653"/>
-                  </a:lnTo>
-                  <a:lnTo>
-                    <a:pt x="2721655" y="244326"/>
-                  </a:lnTo>
-                  <a:lnTo>
-                    <a:pt x="2793278" y="249962"/>
-                  </a:lnTo>
-                  <a:lnTo>
-                    <a:pt x="2864901" y="255561"/>
-                  </a:lnTo>
-                  <a:lnTo>
-                    <a:pt x="2936523" y="261122"/>
-                  </a:lnTo>
-                  <a:lnTo>
-                    <a:pt x="3008146" y="266647"/>
-                  </a:lnTo>
-                  <a:lnTo>
-                    <a:pt x="3079768" y="272136"/>
-                  </a:lnTo>
-                  <a:lnTo>
-                    <a:pt x="3151391" y="277588"/>
-                  </a:lnTo>
-                  <a:lnTo>
-                    <a:pt x="3223013" y="283004"/>
-                  </a:lnTo>
-                  <a:lnTo>
-                    <a:pt x="3294636" y="288385"/>
-                  </a:lnTo>
-                  <a:lnTo>
-                    <a:pt x="3366258" y="293730"/>
-                  </a:lnTo>
-                  <a:lnTo>
-                    <a:pt x="3437881" y="299039"/>
-                  </a:lnTo>
-                  <a:lnTo>
-                    <a:pt x="3509503" y="304314"/>
-                  </a:lnTo>
-                  <a:lnTo>
-                    <a:pt x="3581126" y="309554"/>
-                  </a:lnTo>
-                  <a:lnTo>
-                    <a:pt x="3652748" y="314759"/>
-                  </a:lnTo>
-                  <a:lnTo>
-                    <a:pt x="3724371" y="319930"/>
-                  </a:lnTo>
-                  <a:lnTo>
-                    <a:pt x="3795993" y="325067"/>
-                  </a:lnTo>
-                  <a:lnTo>
-                    <a:pt x="3867616" y="330169"/>
-                  </a:lnTo>
-                  <a:lnTo>
-                    <a:pt x="3939238" y="335239"/>
-                  </a:lnTo>
-                  <a:lnTo>
-                    <a:pt x="4010861" y="340274"/>
-                  </a:lnTo>
-                  <a:lnTo>
-                    <a:pt x="4082483" y="345277"/>
-                  </a:lnTo>
-                  <a:lnTo>
-                    <a:pt x="4154106" y="350246"/>
-                  </a:lnTo>
-                  <a:lnTo>
-                    <a:pt x="4225729" y="355183"/>
-                  </a:lnTo>
-                  <a:lnTo>
-                    <a:pt x="4297351" y="360087"/>
-                  </a:lnTo>
-                  <a:lnTo>
-                    <a:pt x="4368974" y="364958"/>
-                  </a:lnTo>
-                  <a:lnTo>
-                    <a:pt x="4440596" y="369798"/>
-                  </a:lnTo>
-                  <a:lnTo>
-                    <a:pt x="4512219" y="374605"/>
-                  </a:lnTo>
-                  <a:lnTo>
-                    <a:pt x="4583841" y="379381"/>
-                  </a:lnTo>
-                  <a:lnTo>
-                    <a:pt x="4655464" y="384125"/>
-                  </a:lnTo>
-                  <a:lnTo>
-                    <a:pt x="4727086" y="388838"/>
-                  </a:lnTo>
-                  <a:lnTo>
-                    <a:pt x="4798709" y="393520"/>
-                  </a:lnTo>
-                  <a:lnTo>
-                    <a:pt x="4870331" y="398171"/>
-                  </a:lnTo>
-                  <a:lnTo>
-                    <a:pt x="4941954" y="402791"/>
-                  </a:lnTo>
-                  <a:lnTo>
-                    <a:pt x="5013576" y="407381"/>
-                  </a:lnTo>
-                  <a:lnTo>
-                    <a:pt x="5085199" y="411941"/>
-                  </a:lnTo>
-                  <a:lnTo>
-                    <a:pt x="5156821" y="416470"/>
-                  </a:lnTo>
-                  <a:lnTo>
-                    <a:pt x="5228444" y="420969"/>
-                  </a:lnTo>
-                  <a:lnTo>
-                    <a:pt x="5300066" y="425439"/>
-                  </a:lnTo>
-                  <a:lnTo>
-                    <a:pt x="5371689" y="429879"/>
-                  </a:lnTo>
-                  <a:lnTo>
-                    <a:pt x="5443311" y="434290"/>
-                  </a:lnTo>
-                  <a:lnTo>
-                    <a:pt x="5514934" y="438672"/>
-                  </a:lnTo>
-                  <a:lnTo>
-                    <a:pt x="5586557" y="443025"/>
-                  </a:lnTo>
-                  <a:lnTo>
-                    <a:pt x="5658179" y="447349"/>
-                  </a:lnTo>
-                  <a:lnTo>
-                    <a:pt x="5729802" y="451645"/>
-                  </a:lnTo>
-                  <a:lnTo>
-                    <a:pt x="5801424" y="455912"/>
-                  </a:lnTo>
-                  <a:lnTo>
-                    <a:pt x="5873047" y="460151"/>
-                  </a:lnTo>
-                  <a:lnTo>
-                    <a:pt x="5944669" y="464362"/>
-                  </a:lnTo>
-                  <a:lnTo>
-                    <a:pt x="6016292" y="468546"/>
-                  </a:lnTo>
-                  <a:lnTo>
-                    <a:pt x="6087914" y="472701"/>
-                  </a:lnTo>
-                  <a:lnTo>
-                    <a:pt x="6159537" y="476829"/>
-                  </a:lnTo>
-                  <a:lnTo>
-                    <a:pt x="6231159" y="480931"/>
-                  </a:lnTo>
-                  <a:lnTo>
-                    <a:pt x="6302782" y="485004"/>
-                  </a:lnTo>
-                  <a:lnTo>
-                    <a:pt x="6374404" y="489051"/>
-                  </a:lnTo>
-                  <a:lnTo>
-                    <a:pt x="6446027" y="493072"/>
-                  </a:lnTo>
-                  <a:lnTo>
-                    <a:pt x="6517649" y="497066"/>
-                  </a:lnTo>
-                  <a:lnTo>
-                    <a:pt x="6589272" y="501033"/>
-                  </a:lnTo>
-                  <a:lnTo>
-                    <a:pt x="6660894" y="504974"/>
-                  </a:lnTo>
-                  <a:lnTo>
-                    <a:pt x="6732517" y="508890"/>
-                  </a:lnTo>
-                  <a:lnTo>
-                    <a:pt x="6804139" y="512779"/>
-                  </a:lnTo>
-                  <a:lnTo>
-                    <a:pt x="6875762" y="516643"/>
-                  </a:lnTo>
-                  <a:lnTo>
-                    <a:pt x="6947385" y="520481"/>
-                  </a:lnTo>
-                  <a:lnTo>
-                    <a:pt x="7019007" y="524294"/>
-                  </a:lnTo>
-                  <a:lnTo>
-                    <a:pt x="7090630" y="528081"/>
+                    <a:pt x="71622" y="7585"/>
+                  </a:lnTo>
+                  <a:lnTo>
+                    <a:pt x="143245" y="15118"/>
+                  </a:lnTo>
+                  <a:lnTo>
+                    <a:pt x="214867" y="22600"/>
+                  </a:lnTo>
+                  <a:lnTo>
+                    <a:pt x="286490" y="30031"/>
+                  </a:lnTo>
+                  <a:lnTo>
+                    <a:pt x="358112" y="37411"/>
+                  </a:lnTo>
+                  <a:lnTo>
+                    <a:pt x="429735" y="44741"/>
+                  </a:lnTo>
+                  <a:lnTo>
+                    <a:pt x="501357" y="52020"/>
+                  </a:lnTo>
+                  <a:lnTo>
+                    <a:pt x="572980" y="59250"/>
+                  </a:lnTo>
+                  <a:lnTo>
+                    <a:pt x="644602" y="66430"/>
+                  </a:lnTo>
+                  <a:lnTo>
+                    <a:pt x="716225" y="73561"/>
+                  </a:lnTo>
+                  <a:lnTo>
+                    <a:pt x="787847" y="80643"/>
+                  </a:lnTo>
+                  <a:lnTo>
+                    <a:pt x="859470" y="87677"/>
+                  </a:lnTo>
+                  <a:lnTo>
+                    <a:pt x="931092" y="94663"/>
+                  </a:lnTo>
+                  <a:lnTo>
+                    <a:pt x="1002715" y="101601"/>
+                  </a:lnTo>
+                  <a:lnTo>
+                    <a:pt x="1074337" y="108492"/>
+                  </a:lnTo>
+                  <a:lnTo>
+                    <a:pt x="1145960" y="115335"/>
+                  </a:lnTo>
+                  <a:lnTo>
+                    <a:pt x="1217582" y="122132"/>
+                  </a:lnTo>
+                  <a:lnTo>
+                    <a:pt x="1289205" y="128882"/>
+                  </a:lnTo>
+                  <a:lnTo>
+                    <a:pt x="1360827" y="135586"/>
+                  </a:lnTo>
+                  <a:lnTo>
+                    <a:pt x="1432450" y="142244"/>
+                  </a:lnTo>
+                  <a:lnTo>
+                    <a:pt x="1504073" y="148857"/>
+                  </a:lnTo>
+                  <a:lnTo>
+                    <a:pt x="1575695" y="155424"/>
+                  </a:lnTo>
+                  <a:lnTo>
+                    <a:pt x="1647318" y="161947"/>
+                  </a:lnTo>
+                  <a:lnTo>
+                    <a:pt x="1718940" y="168425"/>
+                  </a:lnTo>
+                  <a:lnTo>
+                    <a:pt x="1790563" y="174858"/>
+                  </a:lnTo>
+                  <a:lnTo>
+                    <a:pt x="1862185" y="181248"/>
+                  </a:lnTo>
+                  <a:lnTo>
+                    <a:pt x="1933808" y="187594"/>
+                  </a:lnTo>
+                  <a:lnTo>
+                    <a:pt x="2005430" y="193896"/>
+                  </a:lnTo>
+                  <a:lnTo>
+                    <a:pt x="2077053" y="200156"/>
+                  </a:lnTo>
+                  <a:lnTo>
+                    <a:pt x="2148675" y="206372"/>
+                  </a:lnTo>
+                  <a:lnTo>
+                    <a:pt x="2220298" y="212547"/>
+                  </a:lnTo>
+                  <a:lnTo>
+                    <a:pt x="2291920" y="218678"/>
+                  </a:lnTo>
+                  <a:lnTo>
+                    <a:pt x="2363543" y="224768"/>
+                  </a:lnTo>
+                  <a:lnTo>
+                    <a:pt x="2435165" y="230817"/>
+                  </a:lnTo>
+                  <a:lnTo>
+                    <a:pt x="2506788" y="236824"/>
+                  </a:lnTo>
+                  <a:lnTo>
+                    <a:pt x="2578410" y="242790"/>
+                  </a:lnTo>
+                  <a:lnTo>
+                    <a:pt x="2650033" y="248715"/>
+                  </a:lnTo>
+                  <a:lnTo>
+                    <a:pt x="2721655" y="254599"/>
+                  </a:lnTo>
+                  <a:lnTo>
+                    <a:pt x="2793278" y="260444"/>
+                  </a:lnTo>
+                  <a:lnTo>
+                    <a:pt x="2864901" y="266248"/>
+                  </a:lnTo>
+                  <a:lnTo>
+                    <a:pt x="2936523" y="272013"/>
+                  </a:lnTo>
+                  <a:lnTo>
+                    <a:pt x="3008146" y="277738"/>
+                  </a:lnTo>
+                  <a:lnTo>
+                    <a:pt x="3079768" y="283424"/>
+                  </a:lnTo>
+                  <a:lnTo>
+                    <a:pt x="3151391" y="289071"/>
+                  </a:lnTo>
+                  <a:lnTo>
+                    <a:pt x="3223013" y="294680"/>
+                  </a:lnTo>
+                  <a:lnTo>
+                    <a:pt x="3294636" y="300250"/>
+                  </a:lnTo>
+                  <a:lnTo>
+                    <a:pt x="3366258" y="305782"/>
+                  </a:lnTo>
+                  <a:lnTo>
+                    <a:pt x="3437881" y="311277"/>
+                  </a:lnTo>
+                  <a:lnTo>
+                    <a:pt x="3509503" y="316733"/>
+                  </a:lnTo>
+                  <a:lnTo>
+                    <a:pt x="3581126" y="322153"/>
+                  </a:lnTo>
+                  <a:lnTo>
+                    <a:pt x="3652748" y="327535"/>
+                  </a:lnTo>
+                  <a:lnTo>
+                    <a:pt x="3724371" y="332881"/>
+                  </a:lnTo>
+                  <a:lnTo>
+                    <a:pt x="3795993" y="338190"/>
+                  </a:lnTo>
+                  <a:lnTo>
+                    <a:pt x="3867616" y="343463"/>
+                  </a:lnTo>
+                  <a:lnTo>
+                    <a:pt x="3939238" y="348699"/>
+                  </a:lnTo>
+                  <a:lnTo>
+                    <a:pt x="4010861" y="353900"/>
+                  </a:lnTo>
+                  <a:lnTo>
+                    <a:pt x="4082483" y="359065"/>
+                  </a:lnTo>
+                  <a:lnTo>
+                    <a:pt x="4154106" y="364195"/>
+                  </a:lnTo>
+                  <a:lnTo>
+                    <a:pt x="4225729" y="369290"/>
+                  </a:lnTo>
+                  <a:lnTo>
+                    <a:pt x="4297351" y="374350"/>
+                  </a:lnTo>
+                  <a:lnTo>
+                    <a:pt x="4368974" y="379376"/>
+                  </a:lnTo>
+                  <a:lnTo>
+                    <a:pt x="4440596" y="384367"/>
+                  </a:lnTo>
+                  <a:lnTo>
+                    <a:pt x="4512219" y="389324"/>
+                  </a:lnTo>
+                  <a:lnTo>
+                    <a:pt x="4583841" y="394247"/>
+                  </a:lnTo>
+                  <a:lnTo>
+                    <a:pt x="4655464" y="399136"/>
+                  </a:lnTo>
+                  <a:lnTo>
+                    <a:pt x="4727086" y="403992"/>
+                  </a:lnTo>
+                  <a:lnTo>
+                    <a:pt x="4798709" y="408815"/>
+                  </a:lnTo>
+                  <a:lnTo>
+                    <a:pt x="4870331" y="413605"/>
+                  </a:lnTo>
+                  <a:lnTo>
+                    <a:pt x="4941954" y="418362"/>
+                  </a:lnTo>
+                  <a:lnTo>
+                    <a:pt x="5013576" y="423086"/>
+                  </a:lnTo>
+                  <a:lnTo>
+                    <a:pt x="5085199" y="427778"/>
+                  </a:lnTo>
+                  <a:lnTo>
+                    <a:pt x="5156821" y="432439"/>
+                  </a:lnTo>
+                  <a:lnTo>
+                    <a:pt x="5228444" y="437067"/>
+                  </a:lnTo>
+                  <a:lnTo>
+                    <a:pt x="5300066" y="441663"/>
+                  </a:lnTo>
+                  <a:lnTo>
+                    <a:pt x="5371689" y="446228"/>
+                  </a:lnTo>
+                  <a:lnTo>
+                    <a:pt x="5443311" y="450762"/>
+                  </a:lnTo>
+                  <a:lnTo>
+                    <a:pt x="5514934" y="455265"/>
+                  </a:lnTo>
+                  <a:lnTo>
+                    <a:pt x="5586557" y="459737"/>
+                  </a:lnTo>
+                  <a:lnTo>
+                    <a:pt x="5658179" y="464179"/>
+                  </a:lnTo>
+                  <a:lnTo>
+                    <a:pt x="5729802" y="468590"/>
+                  </a:lnTo>
+                  <a:lnTo>
+                    <a:pt x="5801424" y="472971"/>
+                  </a:lnTo>
+                  <a:lnTo>
+                    <a:pt x="5873047" y="477322"/>
+                  </a:lnTo>
+                  <a:lnTo>
+                    <a:pt x="5944669" y="481644"/>
+                  </a:lnTo>
+                  <a:lnTo>
+                    <a:pt x="6016292" y="485935"/>
+                  </a:lnTo>
+                  <a:lnTo>
+                    <a:pt x="6087914" y="490198"/>
+                  </a:lnTo>
+                  <a:lnTo>
+                    <a:pt x="6159537" y="494431"/>
+                  </a:lnTo>
+                  <a:lnTo>
+                    <a:pt x="6231159" y="498635"/>
+                  </a:lnTo>
+                  <a:lnTo>
+                    <a:pt x="6302782" y="502811"/>
+                  </a:lnTo>
+                  <a:lnTo>
+                    <a:pt x="6374404" y="506958"/>
+                  </a:lnTo>
+                  <a:lnTo>
+                    <a:pt x="6446027" y="511076"/>
+                  </a:lnTo>
+                  <a:lnTo>
+                    <a:pt x="6517649" y="515167"/>
+                  </a:lnTo>
+                  <a:lnTo>
+                    <a:pt x="6589272" y="519229"/>
+                  </a:lnTo>
+                  <a:lnTo>
+                    <a:pt x="6660894" y="523264"/>
+                  </a:lnTo>
+                  <a:lnTo>
+                    <a:pt x="6732517" y="527271"/>
+                  </a:lnTo>
+                  <a:lnTo>
+                    <a:pt x="6804139" y="531251"/>
+                  </a:lnTo>
+                  <a:lnTo>
+                    <a:pt x="6875762" y="535204"/>
+                  </a:lnTo>
+                  <a:lnTo>
+                    <a:pt x="6947385" y="539129"/>
+                  </a:lnTo>
+                  <a:lnTo>
+                    <a:pt x="7019007" y="543028"/>
+                  </a:lnTo>
+                  <a:lnTo>
+                    <a:pt x="7090630" y="546900"/>
                   </a:lnTo>
                 </a:path>
               </a:pathLst>
@@ -5371,7 +5371,7 @@
                   <a:latin typeface="Helvetica"/>
                   <a:cs typeface="Helvetica"/>
                 </a:rPr>
-                <a:t>subHR per 10 % decline: 1.08 (1.01-1.17), p_Bonf = 0.187 (n = 6)  |  per IQR decline (Δ = 27.5 %): 1.25 (1.02-1.53)  |  IQR: [-29.1, -1.6] %</a:t>
+                <a:t>subHR per 10 % decline: 1.09 (1.01-1.17), p_Bonf = 0.151 (n = 6)  |  per IQR decline (Δ = 27.5 %): 1.26 (1.03-1.54)  |  IQR: [-29.1, -1.6] %</a:t>
               </a:r>
             </a:p>
           </p:txBody>
